--- a/results/presentation.pptx
+++ b/results/presentation.pptx
@@ -3704,7 +3704,7 @@
                   <a:srgbClr val="555555"/>
                 </a:solidFill>
               </a:rPr>
-              <a:t>CBS runtime grows with agents but remains tractable at low counts | baseline shown for reference</a:t>
+              <a:t>CBS runtime grows with agents but remains tractable | Joint A* baseline fails completely (0% success) from 8 agents onward</a:t>
             </a:r>
           </a:p>
         </p:txBody>
@@ -5122,7 +5122,7 @@
                   <a:srgbClr val="2C2C2C"/>
                 </a:solidFill>
               </a:rPr>
-              <a:t>• Finds optimal, conflict-free solutions — scales far better than joint A*</a:t>
+              <a:t>• Finds optimal, conflict-free solutions — Joint A* fails completely (0%) from 8 agents onward</a:t>
             </a:r>
           </a:p>
         </p:txBody>
@@ -5983,7 +5983,7 @@
                   <a:srgbClr val="2C2C2C"/>
                 </a:solidFill>
               </a:rPr>
-              <a:t>• Extension: warehouse maps create 2–3× more CT expansions than open maps</a:t>
+              <a:t>• Extension: warehouse maps create 3.7× more CT expansions than open maps (20 agents)</a:t>
             </a:r>
           </a:p>
         </p:txBody>
@@ -10457,7 +10457,7 @@
                   <a:srgbClr val="2C2C2C"/>
                 </a:solidFill>
               </a:rPr>
-              <a:t>• benchmark.py — Map generation, instance runner  [Kfir]</a:t>
+              <a:t>• benchmark.py / joint_astar.py — Joint-State-Space A* baseline, instance runner  [Kfir]</a:t>
             </a:r>
           </a:p>
         </p:txBody>
@@ -10968,7 +10968,7 @@
                   <a:srgbClr val="555555"/>
                 </a:solidFill>
               </a:rPr>
-              <a:t>CBS success rate drops as agents increase | 25 instances per count | 20×20 open grid | 30s time limit</a:t>
+              <a:t>CBS vs. Joint-State-Space A* baseline | 25 instances per count | 20×20 open grid | CBS: 30s limit, Joint A*: 5s limit</a:t>
             </a:r>
           </a:p>
         </p:txBody>

--- a/results/presentation.pptx
+++ b/results/presentation.pptx
@@ -5,24 +5,24 @@
     <p:sldMasterId id="2147483648" r:id="rId1"/>
   </p:sldMasterIdLst>
   <p:sldIdLst>
-    <p:sldId id="256" r:id="rId7"/>
-    <p:sldId id="257" r:id="rId8"/>
-    <p:sldId id="258" r:id="rId9"/>
-    <p:sldId id="259" r:id="rId10"/>
-    <p:sldId id="260" r:id="rId11"/>
-    <p:sldId id="261" r:id="rId12"/>
-    <p:sldId id="262" r:id="rId13"/>
-    <p:sldId id="263" r:id="rId14"/>
-    <p:sldId id="264" r:id="rId15"/>
-    <p:sldId id="265" r:id="rId16"/>
-    <p:sldId id="266" r:id="rId17"/>
-    <p:sldId id="267" r:id="rId18"/>
-    <p:sldId id="268" r:id="rId19"/>
-    <p:sldId id="269" r:id="rId20"/>
-    <p:sldId id="270" r:id="rId21"/>
-    <p:sldId id="271" r:id="rId22"/>
+    <p:sldId id="256" r:id="rId2"/>
+    <p:sldId id="257" r:id="rId3"/>
+    <p:sldId id="258" r:id="rId4"/>
+    <p:sldId id="259" r:id="rId5"/>
+    <p:sldId id="260" r:id="rId6"/>
+    <p:sldId id="261" r:id="rId7"/>
+    <p:sldId id="262" r:id="rId8"/>
+    <p:sldId id="263" r:id="rId9"/>
+    <p:sldId id="264" r:id="rId10"/>
+    <p:sldId id="265" r:id="rId11"/>
+    <p:sldId id="266" r:id="rId12"/>
+    <p:sldId id="267" r:id="rId13"/>
+    <p:sldId id="268" r:id="rId14"/>
+    <p:sldId id="269" r:id="rId15"/>
+    <p:sldId id="270" r:id="rId16"/>
+    <p:sldId id="271" r:id="rId17"/>
   </p:sldIdLst>
-  <p:sldSz cx="12188952" cy="6858000" type="screen4x3"/>
+  <p:sldSz cx="12188825" cy="6858000"/>
   <p:notesSz cx="6858000" cy="9144000"/>
   <p:defaultTextStyle>
     <a:defPPr>
@@ -119,6 +119,22 @@
       </a:defRPr>
     </a:lvl9pPr>
   </p:defaultTextStyle>
+  <p:extLst>
+    <p:ext uri="{EFAFB233-063F-42B5-8137-9DF3F51BA10A}">
+      <p15:sldGuideLst xmlns:p15="http://schemas.microsoft.com/office/powerpoint/2012/main">
+        <p15:guide id="1" orient="horz" pos="2160">
+          <p15:clr>
+            <a:srgbClr val="A4A3A4"/>
+          </p15:clr>
+        </p15:guide>
+        <p15:guide id="2" pos="2880">
+          <p15:clr>
+            <a:srgbClr val="A4A3A4"/>
+          </p15:clr>
+        </p15:guide>
+      </p15:sldGuideLst>
+    </p:ext>
+  </p:extLst>
 </p:presentation>
 </file>
 
@@ -160,10 +176,9 @@
           <a:lstStyle/>
           <a:p>
             <a:r>
-              <a:rPr lang="en-US" smtClean="0"/>
+              <a:rPr lang="en-US"/>
               <a:t>Click to edit Master title style</a:t>
             </a:r>
-            <a:endParaRPr lang="en-US"/>
           </a:p>
         </p:txBody>
       </p:sp>
@@ -279,10 +294,9 @@
           </a:lstStyle>
           <a:p>
             <a:r>
-              <a:rPr lang="en-US" smtClean="0"/>
+              <a:rPr lang="en-US"/>
               <a:t>Click to edit Master subtitle style</a:t>
             </a:r>
-            <a:endParaRPr lang="en-US"/>
           </a:p>
         </p:txBody>
       </p:sp>
@@ -303,7 +317,7 @@
           <a:p>
             <a:fld id="{5BCAD085-E8A6-8845-BD4E-CB4CCA059FC4}" type="datetimeFigureOut">
               <a:rPr lang="en-US" smtClean="0"/>
-              <a:t>1/27/13</a:t>
+              <a:t>6/22/2026</a:t>
             </a:fld>
             <a:endParaRPr lang="en-US"/>
           </a:p>
@@ -397,10 +411,9 @@
           <a:lstStyle/>
           <a:p>
             <a:r>
-              <a:rPr lang="en-US" smtClean="0"/>
+              <a:rPr lang="en-US"/>
               <a:t>Click to edit Master title style</a:t>
             </a:r>
-            <a:endParaRPr lang="en-US"/>
           </a:p>
         </p:txBody>
       </p:sp>
@@ -421,38 +434,37 @@
           <a:p>
             <a:pPr lvl="0"/>
             <a:r>
-              <a:rPr lang="en-US" smtClean="0"/>
+              <a:rPr lang="en-US"/>
               <a:t>Click to edit Master text styles</a:t>
             </a:r>
           </a:p>
           <a:p>
             <a:pPr lvl="1"/>
             <a:r>
-              <a:rPr lang="en-US" smtClean="0"/>
+              <a:rPr lang="en-US"/>
               <a:t>Second level</a:t>
             </a:r>
           </a:p>
           <a:p>
             <a:pPr lvl="2"/>
             <a:r>
-              <a:rPr lang="en-US" smtClean="0"/>
+              <a:rPr lang="en-US"/>
               <a:t>Third level</a:t>
             </a:r>
           </a:p>
           <a:p>
             <a:pPr lvl="3"/>
             <a:r>
-              <a:rPr lang="en-US" smtClean="0"/>
+              <a:rPr lang="en-US"/>
               <a:t>Fourth level</a:t>
             </a:r>
           </a:p>
           <a:p>
             <a:pPr lvl="4"/>
             <a:r>
-              <a:rPr lang="en-US" smtClean="0"/>
+              <a:rPr lang="en-US"/>
               <a:t>Fifth level</a:t>
             </a:r>
-            <a:endParaRPr lang="en-US"/>
           </a:p>
         </p:txBody>
       </p:sp>
@@ -473,7 +485,7 @@
           <a:p>
             <a:fld id="{5BCAD085-E8A6-8845-BD4E-CB4CCA059FC4}" type="datetimeFigureOut">
               <a:rPr lang="en-US" smtClean="0"/>
-              <a:t>1/27/13</a:t>
+              <a:t>6/22/2026</a:t>
             </a:fld>
             <a:endParaRPr lang="en-US"/>
           </a:p>
@@ -572,10 +584,9 @@
           <a:lstStyle/>
           <a:p>
             <a:r>
-              <a:rPr lang="en-US" smtClean="0"/>
+              <a:rPr lang="en-US"/>
               <a:t>Click to edit Master title style</a:t>
             </a:r>
-            <a:endParaRPr lang="en-US"/>
           </a:p>
         </p:txBody>
       </p:sp>
@@ -601,38 +612,37 @@
           <a:p>
             <a:pPr lvl="0"/>
             <a:r>
-              <a:rPr lang="en-US" smtClean="0"/>
+              <a:rPr lang="en-US"/>
               <a:t>Click to edit Master text styles</a:t>
             </a:r>
           </a:p>
           <a:p>
             <a:pPr lvl="1"/>
             <a:r>
-              <a:rPr lang="en-US" smtClean="0"/>
+              <a:rPr lang="en-US"/>
               <a:t>Second level</a:t>
             </a:r>
           </a:p>
           <a:p>
             <a:pPr lvl="2"/>
             <a:r>
-              <a:rPr lang="en-US" smtClean="0"/>
+              <a:rPr lang="en-US"/>
               <a:t>Third level</a:t>
             </a:r>
           </a:p>
           <a:p>
             <a:pPr lvl="3"/>
             <a:r>
-              <a:rPr lang="en-US" smtClean="0"/>
+              <a:rPr lang="en-US"/>
               <a:t>Fourth level</a:t>
             </a:r>
           </a:p>
           <a:p>
             <a:pPr lvl="4"/>
             <a:r>
-              <a:rPr lang="en-US" smtClean="0"/>
+              <a:rPr lang="en-US"/>
               <a:t>Fifth level</a:t>
             </a:r>
-            <a:endParaRPr lang="en-US"/>
           </a:p>
         </p:txBody>
       </p:sp>
@@ -653,7 +663,7 @@
           <a:p>
             <a:fld id="{5BCAD085-E8A6-8845-BD4E-CB4CCA059FC4}" type="datetimeFigureOut">
               <a:rPr lang="en-US" smtClean="0"/>
-              <a:t>1/27/13</a:t>
+              <a:t>6/22/2026</a:t>
             </a:fld>
             <a:endParaRPr lang="en-US"/>
           </a:p>
@@ -747,10 +757,9 @@
           <a:lstStyle/>
           <a:p>
             <a:r>
-              <a:rPr lang="en-US" smtClean="0"/>
+              <a:rPr lang="en-US"/>
               <a:t>Click to edit Master title style</a:t>
             </a:r>
-            <a:endParaRPr lang="en-US"/>
           </a:p>
         </p:txBody>
       </p:sp>
@@ -771,38 +780,37 @@
           <a:p>
             <a:pPr lvl="0"/>
             <a:r>
-              <a:rPr lang="en-US" smtClean="0"/>
+              <a:rPr lang="en-US"/>
               <a:t>Click to edit Master text styles</a:t>
             </a:r>
           </a:p>
           <a:p>
             <a:pPr lvl="1"/>
             <a:r>
-              <a:rPr lang="en-US" smtClean="0"/>
+              <a:rPr lang="en-US"/>
               <a:t>Second level</a:t>
             </a:r>
           </a:p>
           <a:p>
             <a:pPr lvl="2"/>
             <a:r>
-              <a:rPr lang="en-US" smtClean="0"/>
+              <a:rPr lang="en-US"/>
               <a:t>Third level</a:t>
             </a:r>
           </a:p>
           <a:p>
             <a:pPr lvl="3"/>
             <a:r>
-              <a:rPr lang="en-US" smtClean="0"/>
+              <a:rPr lang="en-US"/>
               <a:t>Fourth level</a:t>
             </a:r>
           </a:p>
           <a:p>
             <a:pPr lvl="4"/>
             <a:r>
-              <a:rPr lang="en-US" smtClean="0"/>
+              <a:rPr lang="en-US"/>
               <a:t>Fifth level</a:t>
             </a:r>
-            <a:endParaRPr lang="en-US"/>
           </a:p>
         </p:txBody>
       </p:sp>
@@ -823,7 +831,7 @@
           <a:p>
             <a:fld id="{5BCAD085-E8A6-8845-BD4E-CB4CCA059FC4}" type="datetimeFigureOut">
               <a:rPr lang="en-US" smtClean="0"/>
-              <a:t>1/27/13</a:t>
+              <a:t>6/22/2026</a:t>
             </a:fld>
             <a:endParaRPr lang="en-US"/>
           </a:p>
@@ -926,10 +934,9 @@
           </a:lstStyle>
           <a:p>
             <a:r>
-              <a:rPr lang="en-US" smtClean="0"/>
+              <a:rPr lang="en-US"/>
               <a:t>Click to edit Master title style</a:t>
             </a:r>
-            <a:endParaRPr lang="en-US"/>
           </a:p>
         </p:txBody>
       </p:sp>
@@ -1046,7 +1053,7 @@
           <a:p>
             <a:pPr lvl="0"/>
             <a:r>
-              <a:rPr lang="en-US" smtClean="0"/>
+              <a:rPr lang="en-US"/>
               <a:t>Click to edit Master text styles</a:t>
             </a:r>
           </a:p>
@@ -1069,7 +1076,7 @@
           <a:p>
             <a:fld id="{5BCAD085-E8A6-8845-BD4E-CB4CCA059FC4}" type="datetimeFigureOut">
               <a:rPr lang="en-US" smtClean="0"/>
-              <a:t>1/27/13</a:t>
+              <a:t>6/22/2026</a:t>
             </a:fld>
             <a:endParaRPr lang="en-US"/>
           </a:p>
@@ -1163,10 +1170,9 @@
           <a:lstStyle/>
           <a:p>
             <a:r>
-              <a:rPr lang="en-US" smtClean="0"/>
+              <a:rPr lang="en-US"/>
               <a:t>Click to edit Master title style</a:t>
             </a:r>
-            <a:endParaRPr lang="en-US"/>
           </a:p>
         </p:txBody>
       </p:sp>
@@ -1220,38 +1226,37 @@
           <a:p>
             <a:pPr lvl="0"/>
             <a:r>
-              <a:rPr lang="en-US" smtClean="0"/>
+              <a:rPr lang="en-US"/>
               <a:t>Click to edit Master text styles</a:t>
             </a:r>
           </a:p>
           <a:p>
             <a:pPr lvl="1"/>
             <a:r>
-              <a:rPr lang="en-US" smtClean="0"/>
+              <a:rPr lang="en-US"/>
               <a:t>Second level</a:t>
             </a:r>
           </a:p>
           <a:p>
             <a:pPr lvl="2"/>
             <a:r>
-              <a:rPr lang="en-US" smtClean="0"/>
+              <a:rPr lang="en-US"/>
               <a:t>Third level</a:t>
             </a:r>
           </a:p>
           <a:p>
             <a:pPr lvl="3"/>
             <a:r>
-              <a:rPr lang="en-US" smtClean="0"/>
+              <a:rPr lang="en-US"/>
               <a:t>Fourth level</a:t>
             </a:r>
           </a:p>
           <a:p>
             <a:pPr lvl="4"/>
             <a:r>
-              <a:rPr lang="en-US" smtClean="0"/>
+              <a:rPr lang="en-US"/>
               <a:t>Fifth level</a:t>
             </a:r>
-            <a:endParaRPr lang="en-US"/>
           </a:p>
         </p:txBody>
       </p:sp>
@@ -1305,38 +1310,37 @@
           <a:p>
             <a:pPr lvl="0"/>
             <a:r>
-              <a:rPr lang="en-US" smtClean="0"/>
+              <a:rPr lang="en-US"/>
               <a:t>Click to edit Master text styles</a:t>
             </a:r>
           </a:p>
           <a:p>
             <a:pPr lvl="1"/>
             <a:r>
-              <a:rPr lang="en-US" smtClean="0"/>
+              <a:rPr lang="en-US"/>
               <a:t>Second level</a:t>
             </a:r>
           </a:p>
           <a:p>
             <a:pPr lvl="2"/>
             <a:r>
-              <a:rPr lang="en-US" smtClean="0"/>
+              <a:rPr lang="en-US"/>
               <a:t>Third level</a:t>
             </a:r>
           </a:p>
           <a:p>
             <a:pPr lvl="3"/>
             <a:r>
-              <a:rPr lang="en-US" smtClean="0"/>
+              <a:rPr lang="en-US"/>
               <a:t>Fourth level</a:t>
             </a:r>
           </a:p>
           <a:p>
             <a:pPr lvl="4"/>
             <a:r>
-              <a:rPr lang="en-US" smtClean="0"/>
+              <a:rPr lang="en-US"/>
               <a:t>Fifth level</a:t>
             </a:r>
-            <a:endParaRPr lang="en-US"/>
           </a:p>
         </p:txBody>
       </p:sp>
@@ -1357,7 +1361,7 @@
           <a:p>
             <a:fld id="{5BCAD085-E8A6-8845-BD4E-CB4CCA059FC4}" type="datetimeFigureOut">
               <a:rPr lang="en-US" smtClean="0"/>
-              <a:t>1/27/13</a:t>
+              <a:t>6/22/2026</a:t>
             </a:fld>
             <a:endParaRPr lang="en-US"/>
           </a:p>
@@ -1455,10 +1459,9 @@
           </a:lstStyle>
           <a:p>
             <a:r>
-              <a:rPr lang="en-US" smtClean="0"/>
+              <a:rPr lang="en-US"/>
               <a:t>Click to edit Master title style</a:t>
             </a:r>
-            <a:endParaRPr lang="en-US"/>
           </a:p>
         </p:txBody>
       </p:sp>
@@ -1521,7 +1524,7 @@
           <a:p>
             <a:pPr lvl="0"/>
             <a:r>
-              <a:rPr lang="en-US" smtClean="0"/>
+              <a:rPr lang="en-US"/>
               <a:t>Click to edit Master text styles</a:t>
             </a:r>
           </a:p>
@@ -1577,38 +1580,37 @@
           <a:p>
             <a:pPr lvl="0"/>
             <a:r>
-              <a:rPr lang="en-US" smtClean="0"/>
+              <a:rPr lang="en-US"/>
               <a:t>Click to edit Master text styles</a:t>
             </a:r>
           </a:p>
           <a:p>
             <a:pPr lvl="1"/>
             <a:r>
-              <a:rPr lang="en-US" smtClean="0"/>
+              <a:rPr lang="en-US"/>
               <a:t>Second level</a:t>
             </a:r>
           </a:p>
           <a:p>
             <a:pPr lvl="2"/>
             <a:r>
-              <a:rPr lang="en-US" smtClean="0"/>
+              <a:rPr lang="en-US"/>
               <a:t>Third level</a:t>
             </a:r>
           </a:p>
           <a:p>
             <a:pPr lvl="3"/>
             <a:r>
-              <a:rPr lang="en-US" smtClean="0"/>
+              <a:rPr lang="en-US"/>
               <a:t>Fourth level</a:t>
             </a:r>
           </a:p>
           <a:p>
             <a:pPr lvl="4"/>
             <a:r>
-              <a:rPr lang="en-US" smtClean="0"/>
+              <a:rPr lang="en-US"/>
               <a:t>Fifth level</a:t>
             </a:r>
-            <a:endParaRPr lang="en-US"/>
           </a:p>
         </p:txBody>
       </p:sp>
@@ -1671,7 +1673,7 @@
           <a:p>
             <a:pPr lvl="0"/>
             <a:r>
-              <a:rPr lang="en-US" smtClean="0"/>
+              <a:rPr lang="en-US"/>
               <a:t>Click to edit Master text styles</a:t>
             </a:r>
           </a:p>
@@ -1727,38 +1729,37 @@
           <a:p>
             <a:pPr lvl="0"/>
             <a:r>
-              <a:rPr lang="en-US" smtClean="0"/>
+              <a:rPr lang="en-US"/>
               <a:t>Click to edit Master text styles</a:t>
             </a:r>
           </a:p>
           <a:p>
             <a:pPr lvl="1"/>
             <a:r>
-              <a:rPr lang="en-US" smtClean="0"/>
+              <a:rPr lang="en-US"/>
               <a:t>Second level</a:t>
             </a:r>
           </a:p>
           <a:p>
             <a:pPr lvl="2"/>
             <a:r>
-              <a:rPr lang="en-US" smtClean="0"/>
+              <a:rPr lang="en-US"/>
               <a:t>Third level</a:t>
             </a:r>
           </a:p>
           <a:p>
             <a:pPr lvl="3"/>
             <a:r>
-              <a:rPr lang="en-US" smtClean="0"/>
+              <a:rPr lang="en-US"/>
               <a:t>Fourth level</a:t>
             </a:r>
           </a:p>
           <a:p>
             <a:pPr lvl="4"/>
             <a:r>
-              <a:rPr lang="en-US" smtClean="0"/>
+              <a:rPr lang="en-US"/>
               <a:t>Fifth level</a:t>
             </a:r>
-            <a:endParaRPr lang="en-US"/>
           </a:p>
         </p:txBody>
       </p:sp>
@@ -1779,7 +1780,7 @@
           <a:p>
             <a:fld id="{5BCAD085-E8A6-8845-BD4E-CB4CCA059FC4}" type="datetimeFigureOut">
               <a:rPr lang="en-US" smtClean="0"/>
-              <a:t>1/27/13</a:t>
+              <a:t>6/22/2026</a:t>
             </a:fld>
             <a:endParaRPr lang="en-US"/>
           </a:p>
@@ -1873,10 +1874,9 @@
           <a:lstStyle/>
           <a:p>
             <a:r>
-              <a:rPr lang="en-US" smtClean="0"/>
+              <a:rPr lang="en-US"/>
               <a:t>Click to edit Master title style</a:t>
             </a:r>
-            <a:endParaRPr lang="en-US"/>
           </a:p>
         </p:txBody>
       </p:sp>
@@ -1897,7 +1897,7 @@
           <a:p>
             <a:fld id="{5BCAD085-E8A6-8845-BD4E-CB4CCA059FC4}" type="datetimeFigureOut">
               <a:rPr lang="en-US" smtClean="0"/>
-              <a:t>1/27/13</a:t>
+              <a:t>6/22/2026</a:t>
             </a:fld>
             <a:endParaRPr lang="en-US"/>
           </a:p>
@@ -1992,7 +1992,7 @@
           <a:p>
             <a:fld id="{5BCAD085-E8A6-8845-BD4E-CB4CCA059FC4}" type="datetimeFigureOut">
               <a:rPr lang="en-US" smtClean="0"/>
-              <a:t>1/27/13</a:t>
+              <a:t>6/22/2026</a:t>
             </a:fld>
             <a:endParaRPr lang="en-US"/>
           </a:p>
@@ -2095,10 +2095,9 @@
           </a:lstStyle>
           <a:p>
             <a:r>
-              <a:rPr lang="en-US" smtClean="0"/>
+              <a:rPr lang="en-US"/>
               <a:t>Click to edit Master title style</a:t>
             </a:r>
-            <a:endParaRPr lang="en-US"/>
           </a:p>
         </p:txBody>
       </p:sp>
@@ -2152,38 +2151,37 @@
           <a:p>
             <a:pPr lvl="0"/>
             <a:r>
-              <a:rPr lang="en-US" smtClean="0"/>
+              <a:rPr lang="en-US"/>
               <a:t>Click to edit Master text styles</a:t>
             </a:r>
           </a:p>
           <a:p>
             <a:pPr lvl="1"/>
             <a:r>
-              <a:rPr lang="en-US" smtClean="0"/>
+              <a:rPr lang="en-US"/>
               <a:t>Second level</a:t>
             </a:r>
           </a:p>
           <a:p>
             <a:pPr lvl="2"/>
             <a:r>
-              <a:rPr lang="en-US" smtClean="0"/>
+              <a:rPr lang="en-US"/>
               <a:t>Third level</a:t>
             </a:r>
           </a:p>
           <a:p>
             <a:pPr lvl="3"/>
             <a:r>
-              <a:rPr lang="en-US" smtClean="0"/>
+              <a:rPr lang="en-US"/>
               <a:t>Fourth level</a:t>
             </a:r>
           </a:p>
           <a:p>
             <a:pPr lvl="4"/>
             <a:r>
-              <a:rPr lang="en-US" smtClean="0"/>
+              <a:rPr lang="en-US"/>
               <a:t>Fifth level</a:t>
             </a:r>
-            <a:endParaRPr lang="en-US"/>
           </a:p>
         </p:txBody>
       </p:sp>
@@ -2246,7 +2244,7 @@
           <a:p>
             <a:pPr lvl="0"/>
             <a:r>
-              <a:rPr lang="en-US" smtClean="0"/>
+              <a:rPr lang="en-US"/>
               <a:t>Click to edit Master text styles</a:t>
             </a:r>
           </a:p>
@@ -2269,7 +2267,7 @@
           <a:p>
             <a:fld id="{5BCAD085-E8A6-8845-BD4E-CB4CCA059FC4}" type="datetimeFigureOut">
               <a:rPr lang="en-US" smtClean="0"/>
-              <a:t>1/27/13</a:t>
+              <a:t>6/22/2026</a:t>
             </a:fld>
             <a:endParaRPr lang="en-US"/>
           </a:p>
@@ -2372,10 +2370,9 @@
           </a:lstStyle>
           <a:p>
             <a:r>
-              <a:rPr lang="en-US" smtClean="0"/>
+              <a:rPr lang="en-US"/>
               <a:t>Click to edit Master title style</a:t>
             </a:r>
-            <a:endParaRPr lang="en-US"/>
           </a:p>
         </p:txBody>
       </p:sp>
@@ -2499,7 +2496,7 @@
           <a:p>
             <a:pPr lvl="0"/>
             <a:r>
-              <a:rPr lang="en-US" smtClean="0"/>
+              <a:rPr lang="en-US"/>
               <a:t>Click to edit Master text styles</a:t>
             </a:r>
           </a:p>
@@ -2522,7 +2519,7 @@
           <a:p>
             <a:fld id="{5BCAD085-E8A6-8845-BD4E-CB4CCA059FC4}" type="datetimeFigureOut">
               <a:rPr lang="en-US" smtClean="0"/>
-              <a:t>1/27/13</a:t>
+              <a:t>6/22/2026</a:t>
             </a:fld>
             <a:endParaRPr lang="en-US"/>
           </a:p>
@@ -2631,10 +2628,9 @@
           <a:lstStyle/>
           <a:p>
             <a:r>
-              <a:rPr lang="en-US" smtClean="0"/>
+              <a:rPr lang="en-US"/>
               <a:t>Click to edit Master title style</a:t>
             </a:r>
-            <a:endParaRPr lang="en-US"/>
           </a:p>
         </p:txBody>
       </p:sp>
@@ -2665,38 +2661,37 @@
           <a:p>
             <a:pPr lvl="0"/>
             <a:r>
-              <a:rPr lang="en-US" smtClean="0"/>
+              <a:rPr lang="en-US"/>
               <a:t>Click to edit Master text styles</a:t>
             </a:r>
           </a:p>
           <a:p>
             <a:pPr lvl="1"/>
             <a:r>
-              <a:rPr lang="en-US" smtClean="0"/>
+              <a:rPr lang="en-US"/>
               <a:t>Second level</a:t>
             </a:r>
           </a:p>
           <a:p>
             <a:pPr lvl="2"/>
             <a:r>
-              <a:rPr lang="en-US" smtClean="0"/>
+              <a:rPr lang="en-US"/>
               <a:t>Third level</a:t>
             </a:r>
           </a:p>
           <a:p>
             <a:pPr lvl="3"/>
             <a:r>
-              <a:rPr lang="en-US" smtClean="0"/>
+              <a:rPr lang="en-US"/>
               <a:t>Fourth level</a:t>
             </a:r>
           </a:p>
           <a:p>
             <a:pPr lvl="4"/>
             <a:r>
-              <a:rPr lang="en-US" smtClean="0"/>
+              <a:rPr lang="en-US"/>
               <a:t>Fifth level</a:t>
             </a:r>
-            <a:endParaRPr lang="en-US"/>
           </a:p>
         </p:txBody>
       </p:sp>
@@ -2735,7 +2730,7 @@
           <a:p>
             <a:fld id="{5BCAD085-E8A6-8845-BD4E-CB4CCA059FC4}" type="datetimeFigureOut">
               <a:rPr lang="en-US" smtClean="0"/>
-              <a:t>1/27/13</a:t>
+              <a:t>6/22/2026</a:t>
             </a:fld>
             <a:endParaRPr lang="en-US"/>
           </a:p>
@@ -3094,7 +3089,7 @@
 </file>
 
 <file path=ppt/slides/slide1.xml><?xml version="1.0" encoding="utf-8"?>
-<p:sld xmlns:a="http://schemas.openxmlformats.org/drawingml/2006/main" xmlns:p="http://schemas.openxmlformats.org/presentationml/2006/main" xmlns:r="http://schemas.openxmlformats.org/officeDocument/2006/relationships">
+<p:sld xmlns:a="http://schemas.openxmlformats.org/drawingml/2006/main" xmlns:r="http://schemas.openxmlformats.org/officeDocument/2006/relationships" xmlns:p="http://schemas.openxmlformats.org/presentationml/2006/main">
   <p:cSld>
     <p:spTree>
       <p:nvGrpSpPr>
@@ -3102,7 +3097,14 @@
         <p:cNvGrpSpPr/>
         <p:nvPr/>
       </p:nvGrpSpPr>
-      <p:grpSpPr/>
+      <p:grpSpPr>
+        <a:xfrm>
+          <a:off x="0" y="0"/>
+          <a:ext cx="0" cy="0"/>
+          <a:chOff x="0" y="0"/>
+          <a:chExt cx="0" cy="0"/>
+        </a:xfrm>
+      </p:grpSpPr>
       <p:sp>
         <p:nvSpPr>
           <p:cNvPr id="2" name="Rectangle 1"/>
@@ -3143,6 +3145,7 @@
           <a:lstStyle/>
           <a:p>
             <a:pPr algn="ctr"/>
+            <a:endParaRPr/>
           </a:p>
         </p:txBody>
       </p:sp>
@@ -3186,6 +3189,7 @@
           <a:lstStyle/>
           <a:p>
             <a:pPr algn="ctr"/>
+            <a:endParaRPr/>
           </a:p>
         </p:txBody>
       </p:sp>
@@ -3399,6 +3403,7 @@
           <a:lstStyle/>
           <a:p>
             <a:pPr algn="ctr"/>
+            <a:endParaRPr/>
           </a:p>
         </p:txBody>
       </p:sp>
@@ -3445,7 +3450,7 @@
 </file>
 
 <file path=ppt/slides/slide10.xml><?xml version="1.0" encoding="utf-8"?>
-<p:sld xmlns:a="http://schemas.openxmlformats.org/drawingml/2006/main" xmlns:p="http://schemas.openxmlformats.org/presentationml/2006/main" xmlns:r="http://schemas.openxmlformats.org/officeDocument/2006/relationships">
+<p:sld xmlns:a="http://schemas.openxmlformats.org/drawingml/2006/main" xmlns:r="http://schemas.openxmlformats.org/officeDocument/2006/relationships" xmlns:p="http://schemas.openxmlformats.org/presentationml/2006/main">
   <p:cSld>
     <p:spTree>
       <p:nvGrpSpPr>
@@ -3453,7 +3458,14 @@
         <p:cNvGrpSpPr/>
         <p:nvPr/>
       </p:nvGrpSpPr>
-      <p:grpSpPr/>
+      <p:grpSpPr>
+        <a:xfrm>
+          <a:off x="0" y="0"/>
+          <a:ext cx="0" cy="0"/>
+          <a:chOff x="0" y="0"/>
+          <a:chExt cx="0" cy="0"/>
+        </a:xfrm>
+      </p:grpSpPr>
       <p:sp>
         <p:nvSpPr>
           <p:cNvPr id="2" name="Rectangle 1"/>
@@ -3494,6 +3506,7 @@
           <a:lstStyle/>
           <a:p>
             <a:pPr algn="ctr"/>
+            <a:endParaRPr/>
           </a:p>
         </p:txBody>
       </p:sp>
@@ -3571,6 +3584,7 @@
           <a:lstStyle/>
           <a:p>
             <a:pPr algn="ctr"/>
+            <a:endParaRPr/>
           </a:p>
         </p:txBody>
       </p:sp>
@@ -3648,6 +3662,7 @@
           <a:lstStyle/>
           <a:p>
             <a:pPr algn="ctr"/>
+            <a:endParaRPr/>
           </a:p>
         </p:txBody>
       </p:sp>
@@ -3718,7 +3733,7 @@
 </file>
 
 <file path=ppt/slides/slide11.xml><?xml version="1.0" encoding="utf-8"?>
-<p:sld xmlns:a="http://schemas.openxmlformats.org/drawingml/2006/main" xmlns:p="http://schemas.openxmlformats.org/presentationml/2006/main" xmlns:r="http://schemas.openxmlformats.org/officeDocument/2006/relationships">
+<p:sld xmlns:a="http://schemas.openxmlformats.org/drawingml/2006/main" xmlns:r="http://schemas.openxmlformats.org/officeDocument/2006/relationships" xmlns:p="http://schemas.openxmlformats.org/presentationml/2006/main">
   <p:cSld>
     <p:spTree>
       <p:nvGrpSpPr>
@@ -3726,7 +3741,14 @@
         <p:cNvGrpSpPr/>
         <p:nvPr/>
       </p:nvGrpSpPr>
-      <p:grpSpPr/>
+      <p:grpSpPr>
+        <a:xfrm>
+          <a:off x="0" y="0"/>
+          <a:ext cx="0" cy="0"/>
+          <a:chOff x="0" y="0"/>
+          <a:chExt cx="0" cy="0"/>
+        </a:xfrm>
+      </p:grpSpPr>
       <p:sp>
         <p:nvSpPr>
           <p:cNvPr id="2" name="Rectangle 1"/>
@@ -3767,6 +3789,7 @@
           <a:lstStyle/>
           <a:p>
             <a:pPr algn="ctr"/>
+            <a:endParaRPr/>
           </a:p>
         </p:txBody>
       </p:sp>
@@ -3844,6 +3867,7 @@
           <a:lstStyle/>
           <a:p>
             <a:pPr algn="ctr"/>
+            <a:endParaRPr/>
           </a:p>
         </p:txBody>
       </p:sp>
@@ -3921,6 +3945,7 @@
           <a:lstStyle/>
           <a:p>
             <a:pPr algn="ctr"/>
+            <a:endParaRPr/>
           </a:p>
         </p:txBody>
       </p:sp>
@@ -3991,7 +4016,7 @@
 </file>
 
 <file path=ppt/slides/slide12.xml><?xml version="1.0" encoding="utf-8"?>
-<p:sld xmlns:a="http://schemas.openxmlformats.org/drawingml/2006/main" xmlns:p="http://schemas.openxmlformats.org/presentationml/2006/main" xmlns:r="http://schemas.openxmlformats.org/officeDocument/2006/relationships">
+<p:sld xmlns:a="http://schemas.openxmlformats.org/drawingml/2006/main" xmlns:r="http://schemas.openxmlformats.org/officeDocument/2006/relationships" xmlns:p="http://schemas.openxmlformats.org/presentationml/2006/main">
   <p:cSld>
     <p:spTree>
       <p:nvGrpSpPr>
@@ -3999,7 +4024,14 @@
         <p:cNvGrpSpPr/>
         <p:nvPr/>
       </p:nvGrpSpPr>
-      <p:grpSpPr/>
+      <p:grpSpPr>
+        <a:xfrm>
+          <a:off x="0" y="0"/>
+          <a:ext cx="0" cy="0"/>
+          <a:chOff x="0" y="0"/>
+          <a:chExt cx="0" cy="0"/>
+        </a:xfrm>
+      </p:grpSpPr>
       <p:sp>
         <p:nvSpPr>
           <p:cNvPr id="2" name="Rectangle 1"/>
@@ -4040,6 +4072,7 @@
           <a:lstStyle/>
           <a:p>
             <a:pPr algn="ctr"/>
+            <a:endParaRPr/>
           </a:p>
         </p:txBody>
       </p:sp>
@@ -4117,6 +4150,7 @@
           <a:lstStyle/>
           <a:p>
             <a:pPr algn="ctr"/>
+            <a:endParaRPr/>
           </a:p>
         </p:txBody>
       </p:sp>
@@ -4194,6 +4228,7 @@
           <a:lstStyle/>
           <a:p>
             <a:pPr algn="ctr"/>
+            <a:endParaRPr/>
           </a:p>
         </p:txBody>
       </p:sp>
@@ -4205,7 +4240,7 @@
         </p:nvSpPr>
         <p:spPr>
           <a:xfrm>
-            <a:off x="365760" y="1828800"/>
+            <a:off x="365760" y="1524000"/>
             <a:ext cx="10972800" cy="365760"/>
           </a:xfrm>
           <a:prstGeom prst="rect">
@@ -4221,25 +4256,93 @@
           <a:p>
             <a:pPr algn="l"/>
             <a:r>
+              <a:rPr sz="2000" b="1" i="0" dirty="0">
+                <a:solidFill>
+                  <a:srgbClr val="245C94"/>
+                </a:solidFill>
+              </a:rPr>
+              <a:t>Research Question</a:t>
+            </a:r>
+          </a:p>
+        </p:txBody>
+      </p:sp>
+      <p:sp>
+        <p:nvSpPr>
+          <p:cNvPr id="8" name="TextBox 7"/>
+          <p:cNvSpPr txBox="1"/>
+          <p:nvPr/>
+        </p:nvSpPr>
+        <p:spPr>
+          <a:xfrm>
+            <a:off x="365760" y="1912112"/>
+            <a:ext cx="10972800" cy="502920"/>
+          </a:xfrm>
+          <a:prstGeom prst="rect">
+            <a:avLst/>
+          </a:prstGeom>
+          <a:noFill/>
+        </p:spPr>
+        <p:txBody>
+          <a:bodyPr wrap="square">
+            <a:spAutoFit/>
+          </a:bodyPr>
+          <a:lstStyle/>
+          <a:p>
+            <a:pPr algn="l"/>
+            <a:r>
+              <a:rPr sz="2000" b="0" i="0">
+                <a:solidFill>
+                  <a:srgbClr val="2C2C2C"/>
+                </a:solidFill>
+              </a:rPr>
+              <a:t>• Does map structure affect CBS performance, and why?</a:t>
+            </a:r>
+          </a:p>
+        </p:txBody>
+      </p:sp>
+      <p:sp>
+        <p:nvSpPr>
+          <p:cNvPr id="9" name="TextBox 8"/>
+          <p:cNvSpPr txBox="1"/>
+          <p:nvPr/>
+        </p:nvSpPr>
+        <p:spPr>
+          <a:xfrm>
+            <a:off x="365760" y="2460752"/>
+            <a:ext cx="10972800" cy="365760"/>
+          </a:xfrm>
+          <a:prstGeom prst="rect">
+            <a:avLst/>
+          </a:prstGeom>
+          <a:noFill/>
+        </p:spPr>
+        <p:txBody>
+          <a:bodyPr wrap="square">
+            <a:spAutoFit/>
+          </a:bodyPr>
+          <a:lstStyle/>
+          <a:p>
+            <a:pPr algn="l"/>
+            <a:r>
               <a:rPr sz="2000" b="1" i="0">
                 <a:solidFill>
                   <a:srgbClr val="245C94"/>
                 </a:solidFill>
               </a:rPr>
-              <a:t>Research Question</a:t>
-            </a:r>
-          </a:p>
-        </p:txBody>
-      </p:sp>
-      <p:sp>
-        <p:nvSpPr>
-          <p:cNvPr id="8" name="TextBox 7"/>
-          <p:cNvSpPr txBox="1"/>
-          <p:nvPr/>
-        </p:nvSpPr>
-        <p:spPr>
-          <a:xfrm>
-            <a:off x="365760" y="2267712"/>
+              <a:t>Two Map Types Compared</a:t>
+            </a:r>
+          </a:p>
+        </p:txBody>
+      </p:sp>
+      <p:sp>
+        <p:nvSpPr>
+          <p:cNvPr id="10" name="TextBox 9"/>
+          <p:cNvSpPr txBox="1"/>
+          <p:nvPr/>
+        </p:nvSpPr>
+        <p:spPr>
+          <a:xfrm>
+            <a:off x="365760" y="2899664"/>
             <a:ext cx="10972800" cy="502920"/>
           </a:xfrm>
           <a:prstGeom prst="rect">
@@ -4260,20 +4363,54 @@
                   <a:srgbClr val="2C2C2C"/>
                 </a:solidFill>
               </a:rPr>
-              <a:t>• Does map structure affect CBS performance, and why?</a:t>
-            </a:r>
-          </a:p>
-        </p:txBody>
-      </p:sp>
-      <p:sp>
-        <p:nvSpPr>
-          <p:cNvPr id="9" name="TextBox 8"/>
-          <p:cNvSpPr txBox="1"/>
-          <p:nvPr/>
-        </p:nvSpPr>
-        <p:spPr>
-          <a:xfrm>
-            <a:off x="365760" y="2816352"/>
+              <a:t>• Open grid: 20×20, 10% random obstacles (sparse, many paths)</a:t>
+            </a:r>
+          </a:p>
+        </p:txBody>
+      </p:sp>
+      <p:sp>
+        <p:nvSpPr>
+          <p:cNvPr id="11" name="TextBox 10"/>
+          <p:cNvSpPr txBox="1"/>
+          <p:nvPr/>
+        </p:nvSpPr>
+        <p:spPr>
+          <a:xfrm>
+            <a:off x="365760" y="3448304"/>
+            <a:ext cx="10972800" cy="502920"/>
+          </a:xfrm>
+          <a:prstGeom prst="rect">
+            <a:avLst/>
+          </a:prstGeom>
+          <a:noFill/>
+        </p:spPr>
+        <p:txBody>
+          <a:bodyPr wrap="square">
+            <a:spAutoFit/>
+          </a:bodyPr>
+          <a:lstStyle/>
+          <a:p>
+            <a:pPr algn="l"/>
+            <a:r>
+              <a:rPr sz="2000" b="0" i="0">
+                <a:solidFill>
+                  <a:srgbClr val="2C2C2C"/>
+                </a:solidFill>
+              </a:rPr>
+              <a:t>• Warehouse grid: structured shelf rows + narrow corridors (bottlenecks)</a:t>
+            </a:r>
+          </a:p>
+        </p:txBody>
+      </p:sp>
+      <p:sp>
+        <p:nvSpPr>
+          <p:cNvPr id="12" name="TextBox 11"/>
+          <p:cNvSpPr txBox="1"/>
+          <p:nvPr/>
+        </p:nvSpPr>
+        <p:spPr>
+          <a:xfrm>
+            <a:off x="365760" y="3996944"/>
             <a:ext cx="10972800" cy="365760"/>
           </a:xfrm>
           <a:prstGeom prst="rect">
@@ -4294,20 +4431,20 @@
                   <a:srgbClr val="245C94"/>
                 </a:solidFill>
               </a:rPr>
-              <a:t>Two Map Types Compared</a:t>
-            </a:r>
-          </a:p>
-        </p:txBody>
-      </p:sp>
-      <p:sp>
-        <p:nvSpPr>
-          <p:cNvPr id="10" name="TextBox 9"/>
-          <p:cNvSpPr txBox="1"/>
-          <p:nvPr/>
-        </p:nvSpPr>
-        <p:spPr>
-          <a:xfrm>
-            <a:off x="365760" y="3255264"/>
+              <a:t>Experimental Setup</a:t>
+            </a:r>
+          </a:p>
+        </p:txBody>
+      </p:sp>
+      <p:sp>
+        <p:nvSpPr>
+          <p:cNvPr id="13" name="TextBox 12"/>
+          <p:cNvSpPr txBox="1"/>
+          <p:nvPr/>
+        </p:nvSpPr>
+        <p:spPr>
+          <a:xfrm>
+            <a:off x="365760" y="4435856"/>
             <a:ext cx="10972800" cy="502920"/>
           </a:xfrm>
           <a:prstGeom prst="rect">
@@ -4328,20 +4465,20 @@
                   <a:srgbClr val="2C2C2C"/>
                 </a:solidFill>
               </a:rPr>
-              <a:t>• Open grid: 20×20, 10% random obstacles (sparse, many paths)</a:t>
-            </a:r>
-          </a:p>
-        </p:txBody>
-      </p:sp>
-      <p:sp>
-        <p:nvSpPr>
-          <p:cNvPr id="11" name="TextBox 10"/>
-          <p:cNvSpPr txBox="1"/>
-          <p:nvPr/>
-        </p:nvSpPr>
-        <p:spPr>
-          <a:xfrm>
-            <a:off x="365760" y="3803904"/>
+              <a:t>• 5 agent counts: 4, 6, 8, 10, 12 agents</a:t>
+            </a:r>
+          </a:p>
+        </p:txBody>
+      </p:sp>
+      <p:sp>
+        <p:nvSpPr>
+          <p:cNvPr id="14" name="TextBox 13"/>
+          <p:cNvSpPr txBox="1"/>
+          <p:nvPr/>
+        </p:nvSpPr>
+        <p:spPr>
+          <a:xfrm>
+            <a:off x="365760" y="4984496"/>
             <a:ext cx="10972800" cy="502920"/>
           </a:xfrm>
           <a:prstGeom prst="rect">
@@ -4362,20 +4499,54 @@
                   <a:srgbClr val="2C2C2C"/>
                 </a:solidFill>
               </a:rPr>
-              <a:t>• Warehouse grid: structured shelf rows + narrow corridors (bottlenecks)</a:t>
-            </a:r>
-          </a:p>
-        </p:txBody>
-      </p:sp>
-      <p:sp>
-        <p:nvSpPr>
-          <p:cNvPr id="12" name="TextBox 11"/>
-          <p:cNvSpPr txBox="1"/>
-          <p:nvPr/>
-        </p:nvSpPr>
-        <p:spPr>
-          <a:xfrm>
-            <a:off x="365760" y="4352544"/>
+              <a:t>• 25 instances per agent count per map type</a:t>
+            </a:r>
+          </a:p>
+        </p:txBody>
+      </p:sp>
+      <p:sp>
+        <p:nvSpPr>
+          <p:cNvPr id="15" name="TextBox 14"/>
+          <p:cNvSpPr txBox="1"/>
+          <p:nvPr/>
+        </p:nvSpPr>
+        <p:spPr>
+          <a:xfrm>
+            <a:off x="365760" y="5533136"/>
+            <a:ext cx="10972800" cy="502920"/>
+          </a:xfrm>
+          <a:prstGeom prst="rect">
+            <a:avLst/>
+          </a:prstGeom>
+          <a:noFill/>
+        </p:spPr>
+        <p:txBody>
+          <a:bodyPr wrap="square">
+            <a:spAutoFit/>
+          </a:bodyPr>
+          <a:lstStyle/>
+          <a:p>
+            <a:pPr algn="l"/>
+            <a:r>
+              <a:rPr sz="2000" b="0" i="0">
+                <a:solidFill>
+                  <a:srgbClr val="2C2C2C"/>
+                </a:solidFill>
+              </a:rPr>
+              <a:t>• 15-second time limit per instance</a:t>
+            </a:r>
+          </a:p>
+        </p:txBody>
+      </p:sp>
+      <p:sp>
+        <p:nvSpPr>
+          <p:cNvPr id="16" name="TextBox 15"/>
+          <p:cNvSpPr txBox="1"/>
+          <p:nvPr/>
+        </p:nvSpPr>
+        <p:spPr>
+          <a:xfrm>
+            <a:off x="365760" y="6043675"/>
             <a:ext cx="10972800" cy="365760"/>
           </a:xfrm>
           <a:prstGeom prst="rect">
@@ -4391,25 +4562,25 @@
           <a:p>
             <a:pPr algn="l"/>
             <a:r>
-              <a:rPr sz="2000" b="1" i="0">
+              <a:rPr sz="2000" b="1" i="0" dirty="0">
                 <a:solidFill>
                   <a:srgbClr val="245C94"/>
                 </a:solidFill>
               </a:rPr>
-              <a:t>Experimental Setup</a:t>
-            </a:r>
-          </a:p>
-        </p:txBody>
-      </p:sp>
-      <p:sp>
-        <p:nvSpPr>
-          <p:cNvPr id="13" name="TextBox 12"/>
-          <p:cNvSpPr txBox="1"/>
-          <p:nvPr/>
-        </p:nvSpPr>
-        <p:spPr>
-          <a:xfrm>
-            <a:off x="365760" y="4791456"/>
+              <a:t>Hypothesis</a:t>
+            </a:r>
+          </a:p>
+        </p:txBody>
+      </p:sp>
+      <p:sp>
+        <p:nvSpPr>
+          <p:cNvPr id="17" name="TextBox 16"/>
+          <p:cNvSpPr txBox="1"/>
+          <p:nvPr/>
+        </p:nvSpPr>
+        <p:spPr>
+          <a:xfrm>
+            <a:off x="365760" y="6444488"/>
             <a:ext cx="10972800" cy="502920"/>
           </a:xfrm>
           <a:prstGeom prst="rect">
@@ -4425,143 +4596,7 @@
           <a:p>
             <a:pPr algn="l"/>
             <a:r>
-              <a:rPr sz="2000" b="0" i="0">
-                <a:solidFill>
-                  <a:srgbClr val="2C2C2C"/>
-                </a:solidFill>
-              </a:rPr>
-              <a:t>• 5 agent counts: 4, 6, 8, 10, 12 agents</a:t>
-            </a:r>
-          </a:p>
-        </p:txBody>
-      </p:sp>
-      <p:sp>
-        <p:nvSpPr>
-          <p:cNvPr id="14" name="TextBox 13"/>
-          <p:cNvSpPr txBox="1"/>
-          <p:nvPr/>
-        </p:nvSpPr>
-        <p:spPr>
-          <a:xfrm>
-            <a:off x="365760" y="5340096"/>
-            <a:ext cx="10972800" cy="502920"/>
-          </a:xfrm>
-          <a:prstGeom prst="rect">
-            <a:avLst/>
-          </a:prstGeom>
-          <a:noFill/>
-        </p:spPr>
-        <p:txBody>
-          <a:bodyPr wrap="square">
-            <a:spAutoFit/>
-          </a:bodyPr>
-          <a:lstStyle/>
-          <a:p>
-            <a:pPr algn="l"/>
-            <a:r>
-              <a:rPr sz="2000" b="0" i="0">
-                <a:solidFill>
-                  <a:srgbClr val="2C2C2C"/>
-                </a:solidFill>
-              </a:rPr>
-              <a:t>• 25 instances per agent count per map type</a:t>
-            </a:r>
-          </a:p>
-        </p:txBody>
-      </p:sp>
-      <p:sp>
-        <p:nvSpPr>
-          <p:cNvPr id="15" name="TextBox 14"/>
-          <p:cNvSpPr txBox="1"/>
-          <p:nvPr/>
-        </p:nvSpPr>
-        <p:spPr>
-          <a:xfrm>
-            <a:off x="365760" y="5888736"/>
-            <a:ext cx="10972800" cy="502920"/>
-          </a:xfrm>
-          <a:prstGeom prst="rect">
-            <a:avLst/>
-          </a:prstGeom>
-          <a:noFill/>
-        </p:spPr>
-        <p:txBody>
-          <a:bodyPr wrap="square">
-            <a:spAutoFit/>
-          </a:bodyPr>
-          <a:lstStyle/>
-          <a:p>
-            <a:pPr algn="l"/>
-            <a:r>
-              <a:rPr sz="2000" b="0" i="0">
-                <a:solidFill>
-                  <a:srgbClr val="2C2C2C"/>
-                </a:solidFill>
-              </a:rPr>
-              <a:t>• 15-second time limit per instance</a:t>
-            </a:r>
-          </a:p>
-        </p:txBody>
-      </p:sp>
-      <p:sp>
-        <p:nvSpPr>
-          <p:cNvPr id="16" name="TextBox 15"/>
-          <p:cNvSpPr txBox="1"/>
-          <p:nvPr/>
-        </p:nvSpPr>
-        <p:spPr>
-          <a:xfrm>
-            <a:off x="365760" y="6437375"/>
-            <a:ext cx="10972800" cy="365760"/>
-          </a:xfrm>
-          <a:prstGeom prst="rect">
-            <a:avLst/>
-          </a:prstGeom>
-          <a:noFill/>
-        </p:spPr>
-        <p:txBody>
-          <a:bodyPr wrap="square">
-            <a:spAutoFit/>
-          </a:bodyPr>
-          <a:lstStyle/>
-          <a:p>
-            <a:pPr algn="l"/>
-            <a:r>
-              <a:rPr sz="2000" b="1" i="0">
-                <a:solidFill>
-                  <a:srgbClr val="245C94"/>
-                </a:solidFill>
-              </a:rPr>
-              <a:t>Hypothesis</a:t>
-            </a:r>
-          </a:p>
-        </p:txBody>
-      </p:sp>
-      <p:sp>
-        <p:nvSpPr>
-          <p:cNvPr id="17" name="TextBox 16"/>
-          <p:cNvSpPr txBox="1"/>
-          <p:nvPr/>
-        </p:nvSpPr>
-        <p:spPr>
-          <a:xfrm>
-            <a:off x="365760" y="6876288"/>
-            <a:ext cx="10972800" cy="502920"/>
-          </a:xfrm>
-          <a:prstGeom prst="rect">
-            <a:avLst/>
-          </a:prstGeom>
-          <a:noFill/>
-        </p:spPr>
-        <p:txBody>
-          <a:bodyPr wrap="square">
-            <a:spAutoFit/>
-          </a:bodyPr>
-          <a:lstStyle/>
-          <a:p>
-            <a:pPr algn="l"/>
-            <a:r>
-              <a:rPr sz="2000" b="0" i="0">
+              <a:rPr sz="2000" b="0" i="0" dirty="0">
                 <a:solidFill>
                   <a:srgbClr val="2C2C2C"/>
                 </a:solidFill>
@@ -4580,7 +4615,7 @@
 </file>
 
 <file path=ppt/slides/slide13.xml><?xml version="1.0" encoding="utf-8"?>
-<p:sld xmlns:a="http://schemas.openxmlformats.org/drawingml/2006/main" xmlns:p="http://schemas.openxmlformats.org/presentationml/2006/main" xmlns:r="http://schemas.openxmlformats.org/officeDocument/2006/relationships">
+<p:sld xmlns:a="http://schemas.openxmlformats.org/drawingml/2006/main" xmlns:r="http://schemas.openxmlformats.org/officeDocument/2006/relationships" xmlns:p="http://schemas.openxmlformats.org/presentationml/2006/main">
   <p:cSld>
     <p:spTree>
       <p:nvGrpSpPr>
@@ -4588,7 +4623,14 @@
         <p:cNvGrpSpPr/>
         <p:nvPr/>
       </p:nvGrpSpPr>
-      <p:grpSpPr/>
+      <p:grpSpPr>
+        <a:xfrm>
+          <a:off x="0" y="0"/>
+          <a:ext cx="0" cy="0"/>
+          <a:chOff x="0" y="0"/>
+          <a:chExt cx="0" cy="0"/>
+        </a:xfrm>
+      </p:grpSpPr>
       <p:sp>
         <p:nvSpPr>
           <p:cNvPr id="2" name="Rectangle 1"/>
@@ -4629,6 +4671,7 @@
           <a:lstStyle/>
           <a:p>
             <a:pPr algn="ctr"/>
+            <a:endParaRPr/>
           </a:p>
         </p:txBody>
       </p:sp>
@@ -4706,6 +4749,7 @@
           <a:lstStyle/>
           <a:p>
             <a:pPr algn="ctr"/>
+            <a:endParaRPr/>
           </a:p>
         </p:txBody>
       </p:sp>
@@ -4783,6 +4827,7 @@
           <a:lstStyle/>
           <a:p>
             <a:pPr algn="ctr"/>
+            <a:endParaRPr/>
           </a:p>
         </p:txBody>
       </p:sp>
@@ -4853,7 +4898,7 @@
 </file>
 
 <file path=ppt/slides/slide14.xml><?xml version="1.0" encoding="utf-8"?>
-<p:sld xmlns:a="http://schemas.openxmlformats.org/drawingml/2006/main" xmlns:p="http://schemas.openxmlformats.org/presentationml/2006/main" xmlns:r="http://schemas.openxmlformats.org/officeDocument/2006/relationships">
+<p:sld xmlns:a="http://schemas.openxmlformats.org/drawingml/2006/main" xmlns:r="http://schemas.openxmlformats.org/officeDocument/2006/relationships" xmlns:p="http://schemas.openxmlformats.org/presentationml/2006/main">
   <p:cSld>
     <p:spTree>
       <p:nvGrpSpPr>
@@ -4861,7 +4906,14 @@
         <p:cNvGrpSpPr/>
         <p:nvPr/>
       </p:nvGrpSpPr>
-      <p:grpSpPr/>
+      <p:grpSpPr>
+        <a:xfrm>
+          <a:off x="0" y="0"/>
+          <a:ext cx="0" cy="0"/>
+          <a:chOff x="0" y="0"/>
+          <a:chExt cx="0" cy="0"/>
+        </a:xfrm>
+      </p:grpSpPr>
       <p:sp>
         <p:nvSpPr>
           <p:cNvPr id="2" name="Rectangle 1"/>
@@ -4902,6 +4954,7 @@
           <a:lstStyle/>
           <a:p>
             <a:pPr algn="ctr"/>
+            <a:endParaRPr/>
           </a:p>
         </p:txBody>
       </p:sp>
@@ -4979,6 +5032,7 @@
           <a:lstStyle/>
           <a:p>
             <a:pPr algn="ctr"/>
+            <a:endParaRPr/>
           </a:p>
         </p:txBody>
       </p:sp>
@@ -5056,6 +5110,7 @@
           <a:lstStyle/>
           <a:p>
             <a:pPr algn="ctr"/>
+            <a:endParaRPr/>
           </a:p>
         </p:txBody>
       </p:sp>
@@ -5067,7 +5122,7 @@
         </p:nvSpPr>
         <p:spPr>
           <a:xfrm>
-            <a:off x="365760" y="1828800"/>
+            <a:off x="365760" y="1498600"/>
             <a:ext cx="10972800" cy="365760"/>
           </a:xfrm>
           <a:prstGeom prst="rect">
@@ -5101,7 +5156,7 @@
         </p:nvSpPr>
         <p:spPr>
           <a:xfrm>
-            <a:off x="365760" y="2267712"/>
+            <a:off x="365760" y="1797812"/>
             <a:ext cx="10972800" cy="502920"/>
           </a:xfrm>
           <a:prstGeom prst="rect">
@@ -5117,25 +5172,365 @@
           <a:p>
             <a:pPr algn="l"/>
             <a:r>
+              <a:rPr sz="2000" b="0" i="0" dirty="0">
+                <a:solidFill>
+                  <a:srgbClr val="2C2C2C"/>
+                </a:solidFill>
+              </a:rPr>
+              <a:t>• Finds optimal, conflict-free solutions — Joint A* fails completely (0%) from 8 agents onward</a:t>
+            </a:r>
+          </a:p>
+        </p:txBody>
+      </p:sp>
+      <p:sp>
+        <p:nvSpPr>
+          <p:cNvPr id="9" name="TextBox 8"/>
+          <p:cNvSpPr txBox="1"/>
+          <p:nvPr/>
+        </p:nvSpPr>
+        <p:spPr>
+          <a:xfrm>
+            <a:off x="365760" y="2130552"/>
+            <a:ext cx="10972800" cy="502920"/>
+          </a:xfrm>
+          <a:prstGeom prst="rect">
+            <a:avLst/>
+          </a:prstGeom>
+          <a:noFill/>
+        </p:spPr>
+        <p:txBody>
+          <a:bodyPr wrap="square">
+            <a:spAutoFit/>
+          </a:bodyPr>
+          <a:lstStyle/>
+          <a:p>
+            <a:pPr algn="l"/>
+            <a:r>
+              <a:rPr sz="2000" b="0" i="0" dirty="0">
+                <a:solidFill>
+                  <a:srgbClr val="2C2C2C"/>
+                </a:solidFill>
+              </a:rPr>
+              <a:t>• 100% success rate at 4 agents; drops gracefully with scale</a:t>
+            </a:r>
+          </a:p>
+        </p:txBody>
+      </p:sp>
+      <p:sp>
+        <p:nvSpPr>
+          <p:cNvPr id="10" name="TextBox 9"/>
+          <p:cNvSpPr txBox="1"/>
+          <p:nvPr/>
+        </p:nvSpPr>
+        <p:spPr>
+          <a:xfrm>
+            <a:off x="365760" y="2475992"/>
+            <a:ext cx="10972800" cy="365760"/>
+          </a:xfrm>
+          <a:prstGeom prst="rect">
+            <a:avLst/>
+          </a:prstGeom>
+          <a:noFill/>
+        </p:spPr>
+        <p:txBody>
+          <a:bodyPr wrap="square">
+            <a:spAutoFit/>
+          </a:bodyPr>
+          <a:lstStyle/>
+          <a:p>
+            <a:pPr algn="l"/>
+            <a:r>
+              <a:rPr sz="2000" b="1" i="0" dirty="0">
+                <a:solidFill>
+                  <a:srgbClr val="245C94"/>
+                </a:solidFill>
+              </a:rPr>
+              <a:t>Finding 2: Map Topology Matters</a:t>
+            </a:r>
+          </a:p>
+        </p:txBody>
+      </p:sp>
+      <p:sp>
+        <p:nvSpPr>
+          <p:cNvPr id="11" name="TextBox 10"/>
+          <p:cNvSpPr txBox="1"/>
+          <p:nvPr/>
+        </p:nvSpPr>
+        <p:spPr>
+          <a:xfrm>
+            <a:off x="365760" y="2813304"/>
+            <a:ext cx="10972800" cy="502920"/>
+          </a:xfrm>
+          <a:prstGeom prst="rect">
+            <a:avLst/>
+          </a:prstGeom>
+          <a:noFill/>
+        </p:spPr>
+        <p:txBody>
+          <a:bodyPr wrap="square">
+            <a:spAutoFit/>
+          </a:bodyPr>
+          <a:lstStyle/>
+          <a:p>
+            <a:pPr algn="l"/>
+            <a:r>
+              <a:rPr sz="2000" b="0" i="0" dirty="0">
+                <a:solidFill>
+                  <a:srgbClr val="2C2C2C"/>
+                </a:solidFill>
+              </a:rPr>
+              <a:t>• Warehouse maps (bottlenecks) are significantly harder for CBS</a:t>
+            </a:r>
+          </a:p>
+        </p:txBody>
+      </p:sp>
+      <p:sp>
+        <p:nvSpPr>
+          <p:cNvPr id="12" name="TextBox 11"/>
+          <p:cNvSpPr txBox="1"/>
+          <p:nvPr/>
+        </p:nvSpPr>
+        <p:spPr>
+          <a:xfrm>
+            <a:off x="365760" y="3184144"/>
+            <a:ext cx="10972800" cy="502920"/>
+          </a:xfrm>
+          <a:prstGeom prst="rect">
+            <a:avLst/>
+          </a:prstGeom>
+          <a:noFill/>
+        </p:spPr>
+        <p:txBody>
+          <a:bodyPr wrap="square">
+            <a:spAutoFit/>
+          </a:bodyPr>
+          <a:lstStyle/>
+          <a:p>
+            <a:pPr algn="l"/>
+            <a:r>
+              <a:rPr sz="2000" b="0" i="0" dirty="0">
+                <a:solidFill>
+                  <a:srgbClr val="2C2C2C"/>
+                </a:solidFill>
+              </a:rPr>
+              <a:t>• More conflicts → deeper CT trees → exponentially more search</a:t>
+            </a:r>
+          </a:p>
+        </p:txBody>
+      </p:sp>
+      <p:sp>
+        <p:nvSpPr>
+          <p:cNvPr id="13" name="TextBox 12"/>
+          <p:cNvSpPr txBox="1"/>
+          <p:nvPr/>
+        </p:nvSpPr>
+        <p:spPr>
+          <a:xfrm>
+            <a:off x="365760" y="3567683"/>
+            <a:ext cx="10972800" cy="502920"/>
+          </a:xfrm>
+          <a:prstGeom prst="rect">
+            <a:avLst/>
+          </a:prstGeom>
+          <a:noFill/>
+        </p:spPr>
+        <p:txBody>
+          <a:bodyPr wrap="square">
+            <a:spAutoFit/>
+          </a:bodyPr>
+          <a:lstStyle/>
+          <a:p>
+            <a:pPr algn="l"/>
+            <a:r>
+              <a:rPr sz="2000" b="0" i="0" dirty="0">
+                <a:solidFill>
+                  <a:srgbClr val="2C2C2C"/>
+                </a:solidFill>
+              </a:rPr>
+              <a:t>• Practical insight: CBS deployment depends on environment structure</a:t>
+            </a:r>
+          </a:p>
+        </p:txBody>
+      </p:sp>
+      <p:sp>
+        <p:nvSpPr>
+          <p:cNvPr id="14" name="TextBox 13"/>
+          <p:cNvSpPr txBox="1"/>
+          <p:nvPr/>
+        </p:nvSpPr>
+        <p:spPr>
+          <a:xfrm>
+            <a:off x="365760" y="4002023"/>
+            <a:ext cx="10972800" cy="365760"/>
+          </a:xfrm>
+          <a:prstGeom prst="rect">
+            <a:avLst/>
+          </a:prstGeom>
+          <a:noFill/>
+        </p:spPr>
+        <p:txBody>
+          <a:bodyPr wrap="square">
+            <a:spAutoFit/>
+          </a:bodyPr>
+          <a:lstStyle/>
+          <a:p>
+            <a:pPr algn="l"/>
+            <a:r>
+              <a:rPr sz="2000" b="1" i="0" dirty="0">
+                <a:solidFill>
+                  <a:srgbClr val="245C94"/>
+                </a:solidFill>
+              </a:rPr>
+              <a:t>Finding 3: Python CBS is Efficient</a:t>
+            </a:r>
+          </a:p>
+        </p:txBody>
+      </p:sp>
+      <p:sp>
+        <p:nvSpPr>
+          <p:cNvPr id="15" name="TextBox 14"/>
+          <p:cNvSpPr txBox="1"/>
+          <p:nvPr/>
+        </p:nvSpPr>
+        <p:spPr>
+          <a:xfrm>
+            <a:off x="365760" y="4415536"/>
+            <a:ext cx="10972800" cy="502920"/>
+          </a:xfrm>
+          <a:prstGeom prst="rect">
+            <a:avLst/>
+          </a:prstGeom>
+          <a:noFill/>
+        </p:spPr>
+        <p:txBody>
+          <a:bodyPr wrap="square">
+            <a:spAutoFit/>
+          </a:bodyPr>
+          <a:lstStyle/>
+          <a:p>
+            <a:pPr algn="l"/>
+            <a:r>
+              <a:rPr sz="2000" b="0" i="0" dirty="0">
+                <a:solidFill>
+                  <a:srgbClr val="2C2C2C"/>
+                </a:solidFill>
+              </a:rPr>
+              <a:t>• 4-agent problems solved in under 1 millisecond</a:t>
+            </a:r>
+          </a:p>
+        </p:txBody>
+      </p:sp>
+      <p:sp>
+        <p:nvSpPr>
+          <p:cNvPr id="16" name="TextBox 15"/>
+          <p:cNvSpPr txBox="1"/>
+          <p:nvPr/>
+        </p:nvSpPr>
+        <p:spPr>
+          <a:xfrm>
+            <a:off x="365760" y="4811775"/>
+            <a:ext cx="10972800" cy="502920"/>
+          </a:xfrm>
+          <a:prstGeom prst="rect">
+            <a:avLst/>
+          </a:prstGeom>
+          <a:noFill/>
+        </p:spPr>
+        <p:txBody>
+          <a:bodyPr wrap="square">
+            <a:spAutoFit/>
+          </a:bodyPr>
+          <a:lstStyle/>
+          <a:p>
+            <a:pPr algn="l"/>
+            <a:r>
+              <a:rPr sz="2000" b="0" i="0" dirty="0">
+                <a:solidFill>
+                  <a:srgbClr val="2C2C2C"/>
+                </a:solidFill>
+              </a:rPr>
+              <a:t>• 12-agent warehouse problems solved within 15 seconds</a:t>
+            </a:r>
+          </a:p>
+        </p:txBody>
+      </p:sp>
+      <p:sp>
+        <p:nvSpPr>
+          <p:cNvPr id="17" name="TextBox 16"/>
+          <p:cNvSpPr txBox="1"/>
+          <p:nvPr/>
+        </p:nvSpPr>
+        <p:spPr>
+          <a:xfrm>
+            <a:off x="365760" y="5309615"/>
+            <a:ext cx="10972800" cy="365760"/>
+          </a:xfrm>
+          <a:prstGeom prst="rect">
+            <a:avLst/>
+          </a:prstGeom>
+          <a:noFill/>
+        </p:spPr>
+        <p:txBody>
+          <a:bodyPr wrap="square">
+            <a:spAutoFit/>
+          </a:bodyPr>
+          <a:lstStyle/>
+          <a:p>
+            <a:pPr algn="l"/>
+            <a:r>
+              <a:rPr sz="2000" b="1" i="0">
+                <a:solidFill>
+                  <a:srgbClr val="245C94"/>
+                </a:solidFill>
+              </a:rPr>
+              <a:t>Limitation</a:t>
+            </a:r>
+          </a:p>
+        </p:txBody>
+      </p:sp>
+      <p:sp>
+        <p:nvSpPr>
+          <p:cNvPr id="18" name="TextBox 17"/>
+          <p:cNvSpPr txBox="1"/>
+          <p:nvPr/>
+        </p:nvSpPr>
+        <p:spPr>
+          <a:xfrm>
+            <a:off x="365760" y="5748527"/>
+            <a:ext cx="10972800" cy="502920"/>
+          </a:xfrm>
+          <a:prstGeom prst="rect">
+            <a:avLst/>
+          </a:prstGeom>
+          <a:noFill/>
+        </p:spPr>
+        <p:txBody>
+          <a:bodyPr wrap="square">
+            <a:spAutoFit/>
+          </a:bodyPr>
+          <a:lstStyle/>
+          <a:p>
+            <a:pPr algn="l"/>
+            <a:r>
               <a:rPr sz="2000" b="0" i="0">
                 <a:solidFill>
                   <a:srgbClr val="2C2C2C"/>
                 </a:solidFill>
               </a:rPr>
-              <a:t>• Finds optimal, conflict-free solutions — Joint A* fails completely (0%) from 8 agents onward</a:t>
-            </a:r>
-          </a:p>
-        </p:txBody>
-      </p:sp>
-      <p:sp>
-        <p:nvSpPr>
-          <p:cNvPr id="9" name="TextBox 8"/>
-          <p:cNvSpPr txBox="1"/>
-          <p:nvPr/>
-        </p:nvSpPr>
-        <p:spPr>
-          <a:xfrm>
-            <a:off x="365760" y="2816352"/>
+              <a:t>• Beyond 20 agents, CBS times out → motivates CBS improvements</a:t>
+            </a:r>
+          </a:p>
+        </p:txBody>
+      </p:sp>
+      <p:sp>
+        <p:nvSpPr>
+          <p:cNvPr id="19" name="TextBox 18"/>
+          <p:cNvSpPr txBox="1"/>
+          <p:nvPr/>
+        </p:nvSpPr>
+        <p:spPr>
+          <a:xfrm>
+            <a:off x="365760" y="6132067"/>
             <a:ext cx="10972800" cy="502920"/>
           </a:xfrm>
           <a:prstGeom prst="rect">
@@ -5151,347 +5546,7 @@
           <a:p>
             <a:pPr algn="l"/>
             <a:r>
-              <a:rPr sz="2000" b="0" i="0">
-                <a:solidFill>
-                  <a:srgbClr val="2C2C2C"/>
-                </a:solidFill>
-              </a:rPr>
-              <a:t>• 100% success rate at 4 agents; drops gracefully with scale</a:t>
-            </a:r>
-          </a:p>
-        </p:txBody>
-      </p:sp>
-      <p:sp>
-        <p:nvSpPr>
-          <p:cNvPr id="10" name="TextBox 9"/>
-          <p:cNvSpPr txBox="1"/>
-          <p:nvPr/>
-        </p:nvSpPr>
-        <p:spPr>
-          <a:xfrm>
-            <a:off x="365760" y="3364992"/>
-            <a:ext cx="10972800" cy="365760"/>
-          </a:xfrm>
-          <a:prstGeom prst="rect">
-            <a:avLst/>
-          </a:prstGeom>
-          <a:noFill/>
-        </p:spPr>
-        <p:txBody>
-          <a:bodyPr wrap="square">
-            <a:spAutoFit/>
-          </a:bodyPr>
-          <a:lstStyle/>
-          <a:p>
-            <a:pPr algn="l"/>
-            <a:r>
-              <a:rPr sz="2000" b="1" i="0">
-                <a:solidFill>
-                  <a:srgbClr val="245C94"/>
-                </a:solidFill>
-              </a:rPr>
-              <a:t>Finding 2: Map Topology Matters</a:t>
-            </a:r>
-          </a:p>
-        </p:txBody>
-      </p:sp>
-      <p:sp>
-        <p:nvSpPr>
-          <p:cNvPr id="11" name="TextBox 10"/>
-          <p:cNvSpPr txBox="1"/>
-          <p:nvPr/>
-        </p:nvSpPr>
-        <p:spPr>
-          <a:xfrm>
-            <a:off x="365760" y="3803904"/>
-            <a:ext cx="10972800" cy="502920"/>
-          </a:xfrm>
-          <a:prstGeom prst="rect">
-            <a:avLst/>
-          </a:prstGeom>
-          <a:noFill/>
-        </p:spPr>
-        <p:txBody>
-          <a:bodyPr wrap="square">
-            <a:spAutoFit/>
-          </a:bodyPr>
-          <a:lstStyle/>
-          <a:p>
-            <a:pPr algn="l"/>
-            <a:r>
-              <a:rPr sz="2000" b="0" i="0">
-                <a:solidFill>
-                  <a:srgbClr val="2C2C2C"/>
-                </a:solidFill>
-              </a:rPr>
-              <a:t>• Warehouse maps (bottlenecks) are significantly harder for CBS</a:t>
-            </a:r>
-          </a:p>
-        </p:txBody>
-      </p:sp>
-      <p:sp>
-        <p:nvSpPr>
-          <p:cNvPr id="12" name="TextBox 11"/>
-          <p:cNvSpPr txBox="1"/>
-          <p:nvPr/>
-        </p:nvSpPr>
-        <p:spPr>
-          <a:xfrm>
-            <a:off x="365760" y="4352544"/>
-            <a:ext cx="10972800" cy="502920"/>
-          </a:xfrm>
-          <a:prstGeom prst="rect">
-            <a:avLst/>
-          </a:prstGeom>
-          <a:noFill/>
-        </p:spPr>
-        <p:txBody>
-          <a:bodyPr wrap="square">
-            <a:spAutoFit/>
-          </a:bodyPr>
-          <a:lstStyle/>
-          <a:p>
-            <a:pPr algn="l"/>
-            <a:r>
-              <a:rPr sz="2000" b="0" i="0">
-                <a:solidFill>
-                  <a:srgbClr val="2C2C2C"/>
-                </a:solidFill>
-              </a:rPr>
-              <a:t>• More conflicts → deeper CT trees → exponentially more search</a:t>
-            </a:r>
-          </a:p>
-        </p:txBody>
-      </p:sp>
-      <p:sp>
-        <p:nvSpPr>
-          <p:cNvPr id="13" name="TextBox 12"/>
-          <p:cNvSpPr txBox="1"/>
-          <p:nvPr/>
-        </p:nvSpPr>
-        <p:spPr>
-          <a:xfrm>
-            <a:off x="365760" y="4901183"/>
-            <a:ext cx="10972800" cy="502920"/>
-          </a:xfrm>
-          <a:prstGeom prst="rect">
-            <a:avLst/>
-          </a:prstGeom>
-          <a:noFill/>
-        </p:spPr>
-        <p:txBody>
-          <a:bodyPr wrap="square">
-            <a:spAutoFit/>
-          </a:bodyPr>
-          <a:lstStyle/>
-          <a:p>
-            <a:pPr algn="l"/>
-            <a:r>
-              <a:rPr sz="2000" b="0" i="0">
-                <a:solidFill>
-                  <a:srgbClr val="2C2C2C"/>
-                </a:solidFill>
-              </a:rPr>
-              <a:t>• Practical insight: CBS deployment depends on environment structure</a:t>
-            </a:r>
-          </a:p>
-        </p:txBody>
-      </p:sp>
-      <p:sp>
-        <p:nvSpPr>
-          <p:cNvPr id="14" name="TextBox 13"/>
-          <p:cNvSpPr txBox="1"/>
-          <p:nvPr/>
-        </p:nvSpPr>
-        <p:spPr>
-          <a:xfrm>
-            <a:off x="365760" y="5449823"/>
-            <a:ext cx="10972800" cy="365760"/>
-          </a:xfrm>
-          <a:prstGeom prst="rect">
-            <a:avLst/>
-          </a:prstGeom>
-          <a:noFill/>
-        </p:spPr>
-        <p:txBody>
-          <a:bodyPr wrap="square">
-            <a:spAutoFit/>
-          </a:bodyPr>
-          <a:lstStyle/>
-          <a:p>
-            <a:pPr algn="l"/>
-            <a:r>
-              <a:rPr sz="2000" b="1" i="0">
-                <a:solidFill>
-                  <a:srgbClr val="245C94"/>
-                </a:solidFill>
-              </a:rPr>
-              <a:t>Finding 3: Python CBS is Efficient</a:t>
-            </a:r>
-          </a:p>
-        </p:txBody>
-      </p:sp>
-      <p:sp>
-        <p:nvSpPr>
-          <p:cNvPr id="15" name="TextBox 14"/>
-          <p:cNvSpPr txBox="1"/>
-          <p:nvPr/>
-        </p:nvSpPr>
-        <p:spPr>
-          <a:xfrm>
-            <a:off x="365760" y="5888736"/>
-            <a:ext cx="10972800" cy="502920"/>
-          </a:xfrm>
-          <a:prstGeom prst="rect">
-            <a:avLst/>
-          </a:prstGeom>
-          <a:noFill/>
-        </p:spPr>
-        <p:txBody>
-          <a:bodyPr wrap="square">
-            <a:spAutoFit/>
-          </a:bodyPr>
-          <a:lstStyle/>
-          <a:p>
-            <a:pPr algn="l"/>
-            <a:r>
-              <a:rPr sz="2000" b="0" i="0">
-                <a:solidFill>
-                  <a:srgbClr val="2C2C2C"/>
-                </a:solidFill>
-              </a:rPr>
-              <a:t>• 4-agent problems solved in under 1 millisecond</a:t>
-            </a:r>
-          </a:p>
-        </p:txBody>
-      </p:sp>
-      <p:sp>
-        <p:nvSpPr>
-          <p:cNvPr id="16" name="TextBox 15"/>
-          <p:cNvSpPr txBox="1"/>
-          <p:nvPr/>
-        </p:nvSpPr>
-        <p:spPr>
-          <a:xfrm>
-            <a:off x="365760" y="6437375"/>
-            <a:ext cx="10972800" cy="502920"/>
-          </a:xfrm>
-          <a:prstGeom prst="rect">
-            <a:avLst/>
-          </a:prstGeom>
-          <a:noFill/>
-        </p:spPr>
-        <p:txBody>
-          <a:bodyPr wrap="square">
-            <a:spAutoFit/>
-          </a:bodyPr>
-          <a:lstStyle/>
-          <a:p>
-            <a:pPr algn="l"/>
-            <a:r>
-              <a:rPr sz="2000" b="0" i="0">
-                <a:solidFill>
-                  <a:srgbClr val="2C2C2C"/>
-                </a:solidFill>
-              </a:rPr>
-              <a:t>• 12-agent warehouse problems solved within 15 seconds</a:t>
-            </a:r>
-          </a:p>
-        </p:txBody>
-      </p:sp>
-      <p:sp>
-        <p:nvSpPr>
-          <p:cNvPr id="17" name="TextBox 16"/>
-          <p:cNvSpPr txBox="1"/>
-          <p:nvPr/>
-        </p:nvSpPr>
-        <p:spPr>
-          <a:xfrm>
-            <a:off x="365760" y="6986015"/>
-            <a:ext cx="10972800" cy="365760"/>
-          </a:xfrm>
-          <a:prstGeom prst="rect">
-            <a:avLst/>
-          </a:prstGeom>
-          <a:noFill/>
-        </p:spPr>
-        <p:txBody>
-          <a:bodyPr wrap="square">
-            <a:spAutoFit/>
-          </a:bodyPr>
-          <a:lstStyle/>
-          <a:p>
-            <a:pPr algn="l"/>
-            <a:r>
-              <a:rPr sz="2000" b="1" i="0">
-                <a:solidFill>
-                  <a:srgbClr val="245C94"/>
-                </a:solidFill>
-              </a:rPr>
-              <a:t>Limitation</a:t>
-            </a:r>
-          </a:p>
-        </p:txBody>
-      </p:sp>
-      <p:sp>
-        <p:nvSpPr>
-          <p:cNvPr id="18" name="TextBox 17"/>
-          <p:cNvSpPr txBox="1"/>
-          <p:nvPr/>
-        </p:nvSpPr>
-        <p:spPr>
-          <a:xfrm>
-            <a:off x="365760" y="7424927"/>
-            <a:ext cx="10972800" cy="502920"/>
-          </a:xfrm>
-          <a:prstGeom prst="rect">
-            <a:avLst/>
-          </a:prstGeom>
-          <a:noFill/>
-        </p:spPr>
-        <p:txBody>
-          <a:bodyPr wrap="square">
-            <a:spAutoFit/>
-          </a:bodyPr>
-          <a:lstStyle/>
-          <a:p>
-            <a:pPr algn="l"/>
-            <a:r>
-              <a:rPr sz="2000" b="0" i="0">
-                <a:solidFill>
-                  <a:srgbClr val="2C2C2C"/>
-                </a:solidFill>
-              </a:rPr>
-              <a:t>• Beyond 20 agents, CBS times out → motivates CBS improvements</a:t>
-            </a:r>
-          </a:p>
-        </p:txBody>
-      </p:sp>
-      <p:sp>
-        <p:nvSpPr>
-          <p:cNvPr id="19" name="TextBox 18"/>
-          <p:cNvSpPr txBox="1"/>
-          <p:nvPr/>
-        </p:nvSpPr>
-        <p:spPr>
-          <a:xfrm>
-            <a:off x="365760" y="7973567"/>
-            <a:ext cx="10972800" cy="502920"/>
-          </a:xfrm>
-          <a:prstGeom prst="rect">
-            <a:avLst/>
-          </a:prstGeom>
-          <a:noFill/>
-        </p:spPr>
-        <p:txBody>
-          <a:bodyPr wrap="square">
-            <a:spAutoFit/>
-          </a:bodyPr>
-          <a:lstStyle/>
-          <a:p>
-            <a:pPr algn="l"/>
-            <a:r>
-              <a:rPr sz="2000" b="0" i="0">
+              <a:rPr sz="2000" b="0" i="0" dirty="0">
                 <a:solidFill>
                   <a:srgbClr val="2C2C2C"/>
                 </a:solidFill>
@@ -5510,7 +5565,7 @@
 </file>
 
 <file path=ppt/slides/slide15.xml><?xml version="1.0" encoding="utf-8"?>
-<p:sld xmlns:a="http://schemas.openxmlformats.org/drawingml/2006/main" xmlns:p="http://schemas.openxmlformats.org/presentationml/2006/main" xmlns:r="http://schemas.openxmlformats.org/officeDocument/2006/relationships">
+<p:sld xmlns:a="http://schemas.openxmlformats.org/drawingml/2006/main" xmlns:r="http://schemas.openxmlformats.org/officeDocument/2006/relationships" xmlns:p="http://schemas.openxmlformats.org/presentationml/2006/main">
   <p:cSld>
     <p:spTree>
       <p:nvGrpSpPr>
@@ -5518,7 +5573,14 @@
         <p:cNvGrpSpPr/>
         <p:nvPr/>
       </p:nvGrpSpPr>
-      <p:grpSpPr/>
+      <p:grpSpPr>
+        <a:xfrm>
+          <a:off x="0" y="0"/>
+          <a:ext cx="0" cy="0"/>
+          <a:chOff x="0" y="0"/>
+          <a:chExt cx="0" cy="0"/>
+        </a:xfrm>
+      </p:grpSpPr>
       <p:sp>
         <p:nvSpPr>
           <p:cNvPr id="2" name="Rectangle 1"/>
@@ -5559,6 +5621,7 @@
           <a:lstStyle/>
           <a:p>
             <a:pPr algn="ctr"/>
+            <a:endParaRPr/>
           </a:p>
         </p:txBody>
       </p:sp>
@@ -5636,6 +5699,7 @@
           <a:lstStyle/>
           <a:p>
             <a:pPr algn="ctr"/>
+            <a:endParaRPr/>
           </a:p>
         </p:txBody>
       </p:sp>
@@ -5713,6 +5777,7 @@
           <a:lstStyle/>
           <a:p>
             <a:pPr algn="ctr"/>
+            <a:endParaRPr/>
           </a:p>
         </p:txBody>
       </p:sp>
@@ -5724,7 +5789,7 @@
         </p:nvSpPr>
         <p:spPr>
           <a:xfrm>
-            <a:off x="365760" y="1828800"/>
+            <a:off x="365760" y="1498600"/>
             <a:ext cx="10972800" cy="502920"/>
           </a:xfrm>
           <a:prstGeom prst="rect">
@@ -5758,7 +5823,7 @@
         </p:nvSpPr>
         <p:spPr>
           <a:xfrm>
-            <a:off x="365760" y="2377440"/>
+            <a:off x="365760" y="2047240"/>
             <a:ext cx="10972800" cy="502920"/>
           </a:xfrm>
           <a:prstGeom prst="rect">
@@ -5792,7 +5857,7 @@
         </p:nvSpPr>
         <p:spPr>
           <a:xfrm>
-            <a:off x="365760" y="2926080"/>
+            <a:off x="365760" y="2595880"/>
             <a:ext cx="10972800" cy="502920"/>
           </a:xfrm>
           <a:prstGeom prst="rect">
@@ -5826,7 +5891,7 @@
         </p:nvSpPr>
         <p:spPr>
           <a:xfrm>
-            <a:off x="365760" y="3474720"/>
+            <a:off x="365760" y="3144520"/>
             <a:ext cx="10972800" cy="502920"/>
           </a:xfrm>
           <a:prstGeom prst="rect">
@@ -5860,7 +5925,7 @@
         </p:nvSpPr>
         <p:spPr>
           <a:xfrm>
-            <a:off x="365760" y="4023360"/>
+            <a:off x="365760" y="3693160"/>
             <a:ext cx="10972800" cy="365760"/>
           </a:xfrm>
           <a:prstGeom prst="rect">
@@ -5894,7 +5959,7 @@
         </p:nvSpPr>
         <p:spPr>
           <a:xfrm>
-            <a:off x="365760" y="4462272"/>
+            <a:off x="365760" y="4132072"/>
             <a:ext cx="10972800" cy="502920"/>
           </a:xfrm>
           <a:prstGeom prst="rect">
@@ -5928,7 +5993,7 @@
         </p:nvSpPr>
         <p:spPr>
           <a:xfrm>
-            <a:off x="365760" y="5010912"/>
+            <a:off x="365760" y="4528312"/>
             <a:ext cx="10972800" cy="502920"/>
           </a:xfrm>
           <a:prstGeom prst="rect">
@@ -5944,7 +6009,7 @@
           <a:p>
             <a:pPr algn="l"/>
             <a:r>
-              <a:rPr sz="2000" b="0" i="0">
+              <a:rPr sz="2000" b="0" i="0" dirty="0">
                 <a:solidFill>
                   <a:srgbClr val="2C2C2C"/>
                 </a:solidFill>
@@ -5962,7 +6027,7 @@
         </p:nvSpPr>
         <p:spPr>
           <a:xfrm>
-            <a:off x="365760" y="5559552"/>
+            <a:off x="365760" y="4962652"/>
             <a:ext cx="10972800" cy="502920"/>
           </a:xfrm>
           <a:prstGeom prst="rect">
@@ -5978,7 +6043,7 @@
           <a:p>
             <a:pPr algn="l"/>
             <a:r>
-              <a:rPr sz="2000" b="0" i="0">
+              <a:rPr sz="2000" b="0" i="0" dirty="0">
                 <a:solidFill>
                   <a:srgbClr val="2C2C2C"/>
                 </a:solidFill>
@@ -5996,7 +6061,7 @@
         </p:nvSpPr>
         <p:spPr>
           <a:xfrm>
-            <a:off x="365760" y="6108192"/>
+            <a:off x="365760" y="5371592"/>
             <a:ext cx="10972800" cy="365760"/>
           </a:xfrm>
           <a:prstGeom prst="rect">
@@ -6012,7 +6077,7 @@
           <a:p>
             <a:pPr algn="l"/>
             <a:r>
-              <a:rPr sz="2000" b="1" i="0">
+              <a:rPr sz="2000" b="1" i="0" dirty="0">
                 <a:solidFill>
                   <a:srgbClr val="245C94"/>
                 </a:solidFill>
@@ -6030,7 +6095,7 @@
         </p:nvSpPr>
         <p:spPr>
           <a:xfrm>
-            <a:off x="365760" y="6547104"/>
+            <a:off x="365760" y="5721604"/>
             <a:ext cx="10972800" cy="502920"/>
           </a:xfrm>
           <a:prstGeom prst="rect">
@@ -6046,7 +6111,7 @@
           <a:p>
             <a:pPr algn="l"/>
             <a:r>
-              <a:rPr sz="2000" b="0" i="0">
+              <a:rPr sz="2000" b="0" i="0" dirty="0">
                 <a:solidFill>
                   <a:srgbClr val="2C2C2C"/>
                 </a:solidFill>
@@ -6064,7 +6129,7 @@
         </p:nvSpPr>
         <p:spPr>
           <a:xfrm>
-            <a:off x="365760" y="7095744"/>
+            <a:off x="365760" y="6092444"/>
             <a:ext cx="10972800" cy="502920"/>
           </a:xfrm>
           <a:prstGeom prst="rect">
@@ -6080,7 +6145,7 @@
           <a:p>
             <a:pPr algn="l"/>
             <a:r>
-              <a:rPr sz="2000" b="0" i="0">
+              <a:rPr sz="2000" b="0" i="0" dirty="0">
                 <a:solidFill>
                   <a:srgbClr val="2C2C2C"/>
                 </a:solidFill>
@@ -6099,7 +6164,7 @@
 </file>
 
 <file path=ppt/slides/slide16.xml><?xml version="1.0" encoding="utf-8"?>
-<p:sld xmlns:a="http://schemas.openxmlformats.org/drawingml/2006/main" xmlns:p="http://schemas.openxmlformats.org/presentationml/2006/main" xmlns:r="http://schemas.openxmlformats.org/officeDocument/2006/relationships">
+<p:sld xmlns:a="http://schemas.openxmlformats.org/drawingml/2006/main" xmlns:r="http://schemas.openxmlformats.org/officeDocument/2006/relationships" xmlns:p="http://schemas.openxmlformats.org/presentationml/2006/main">
   <p:cSld>
     <p:spTree>
       <p:nvGrpSpPr>
@@ -6107,7 +6172,14 @@
         <p:cNvGrpSpPr/>
         <p:nvPr/>
       </p:nvGrpSpPr>
-      <p:grpSpPr/>
+      <p:grpSpPr>
+        <a:xfrm>
+          <a:off x="0" y="0"/>
+          <a:ext cx="0" cy="0"/>
+          <a:chOff x="0" y="0"/>
+          <a:chExt cx="0" cy="0"/>
+        </a:xfrm>
+      </p:grpSpPr>
       <p:sp>
         <p:nvSpPr>
           <p:cNvPr id="2" name="Rectangle 1"/>
@@ -6148,6 +6220,7 @@
           <a:lstStyle/>
           <a:p>
             <a:pPr algn="ctr"/>
+            <a:endParaRPr/>
           </a:p>
         </p:txBody>
       </p:sp>
@@ -6191,6 +6264,7 @@
           <a:lstStyle/>
           <a:p>
             <a:pPr algn="ctr"/>
+            <a:endParaRPr/>
           </a:p>
         </p:txBody>
       </p:sp>
@@ -6404,6 +6478,7 @@
           <a:lstStyle/>
           <a:p>
             <a:pPr algn="ctr"/>
+            <a:endParaRPr/>
           </a:p>
         </p:txBody>
       </p:sp>
@@ -6450,7 +6525,7 @@
 </file>
 
 <file path=ppt/slides/slide2.xml><?xml version="1.0" encoding="utf-8"?>
-<p:sld xmlns:a="http://schemas.openxmlformats.org/drawingml/2006/main" xmlns:p="http://schemas.openxmlformats.org/presentationml/2006/main" xmlns:r="http://schemas.openxmlformats.org/officeDocument/2006/relationships">
+<p:sld xmlns:a="http://schemas.openxmlformats.org/drawingml/2006/main" xmlns:r="http://schemas.openxmlformats.org/officeDocument/2006/relationships" xmlns:p="http://schemas.openxmlformats.org/presentationml/2006/main">
   <p:cSld>
     <p:spTree>
       <p:nvGrpSpPr>
@@ -6458,7 +6533,14 @@
         <p:cNvGrpSpPr/>
         <p:nvPr/>
       </p:nvGrpSpPr>
-      <p:grpSpPr/>
+      <p:grpSpPr>
+        <a:xfrm>
+          <a:off x="0" y="0"/>
+          <a:ext cx="0" cy="0"/>
+          <a:chOff x="0" y="0"/>
+          <a:chExt cx="0" cy="0"/>
+        </a:xfrm>
+      </p:grpSpPr>
       <p:sp>
         <p:nvSpPr>
           <p:cNvPr id="2" name="Rectangle 1"/>
@@ -6499,6 +6581,7 @@
           <a:lstStyle/>
           <a:p>
             <a:pPr algn="ctr"/>
+            <a:endParaRPr/>
           </a:p>
         </p:txBody>
       </p:sp>
@@ -6576,6 +6659,7 @@
           <a:lstStyle/>
           <a:p>
             <a:pPr algn="ctr"/>
+            <a:endParaRPr/>
           </a:p>
         </p:txBody>
       </p:sp>
@@ -6653,6 +6737,7 @@
           <a:lstStyle/>
           <a:p>
             <a:pPr algn="ctr"/>
+            <a:endParaRPr/>
           </a:p>
         </p:txBody>
       </p:sp>
@@ -6664,7 +6749,7 @@
         </p:nvSpPr>
         <p:spPr>
           <a:xfrm>
-            <a:off x="365760" y="1828800"/>
+            <a:off x="365760" y="1682496"/>
             <a:ext cx="10972800" cy="502920"/>
           </a:xfrm>
           <a:prstGeom prst="rect">
@@ -6680,7 +6765,7 @@
           <a:p>
             <a:pPr algn="l"/>
             <a:r>
-              <a:rPr sz="2000" b="0" i="0">
+              <a:rPr sz="2000" b="0" i="0" dirty="0">
                 <a:solidFill>
                   <a:srgbClr val="2C2C2C"/>
                 </a:solidFill>
@@ -6698,7 +6783,7 @@
         </p:nvSpPr>
         <p:spPr>
           <a:xfrm>
-            <a:off x="365760" y="2377440"/>
+            <a:off x="365760" y="2140556"/>
             <a:ext cx="10972800" cy="502920"/>
           </a:xfrm>
           <a:prstGeom prst="rect">
@@ -6714,7 +6799,7 @@
           <a:p>
             <a:pPr algn="l"/>
             <a:r>
-              <a:rPr sz="2000" b="0" i="0">
+              <a:rPr sz="2000" b="0" i="0" dirty="0">
                 <a:solidFill>
                   <a:srgbClr val="2C2C2C"/>
                 </a:solidFill>
@@ -6732,7 +6817,7 @@
         </p:nvSpPr>
         <p:spPr>
           <a:xfrm>
-            <a:off x="365760" y="2926080"/>
+            <a:off x="365760" y="2643476"/>
             <a:ext cx="10972800" cy="502920"/>
           </a:xfrm>
           <a:prstGeom prst="rect">
@@ -6748,7 +6833,7 @@
           <a:p>
             <a:pPr algn="l"/>
             <a:r>
-              <a:rPr sz="2000" b="0" i="0">
+              <a:rPr sz="2000" b="0" i="0" dirty="0">
                 <a:solidFill>
                   <a:srgbClr val="2C2C2C"/>
                 </a:solidFill>
@@ -6766,7 +6851,7 @@
         </p:nvSpPr>
         <p:spPr>
           <a:xfrm>
-            <a:off x="365760" y="3474720"/>
+            <a:off x="365760" y="3088590"/>
             <a:ext cx="10972800" cy="502920"/>
           </a:xfrm>
           <a:prstGeom prst="rect">
@@ -6782,7 +6867,7 @@
           <a:p>
             <a:pPr algn="l"/>
             <a:r>
-              <a:rPr sz="2000" b="0" i="0">
+              <a:rPr sz="2000" b="0" i="0" dirty="0">
                 <a:solidFill>
                   <a:srgbClr val="2C2C2C"/>
                 </a:solidFill>
@@ -6800,7 +6885,7 @@
         </p:nvSpPr>
         <p:spPr>
           <a:xfrm>
-            <a:off x="365760" y="4023360"/>
+            <a:off x="365760" y="3567971"/>
             <a:ext cx="10972800" cy="365760"/>
           </a:xfrm>
           <a:prstGeom prst="rect">
@@ -6816,7 +6901,7 @@
           <a:p>
             <a:pPr algn="l"/>
             <a:r>
-              <a:rPr sz="2000" b="1" i="0">
+              <a:rPr sz="2000" b="1" i="0" dirty="0">
                 <a:solidFill>
                   <a:srgbClr val="245C94"/>
                 </a:solidFill>
@@ -6834,7 +6919,7 @@
         </p:nvSpPr>
         <p:spPr>
           <a:xfrm>
-            <a:off x="365760" y="4462272"/>
+            <a:off x="365760" y="3948941"/>
             <a:ext cx="10972800" cy="502920"/>
           </a:xfrm>
           <a:prstGeom prst="rect">
@@ -6850,7 +6935,7 @@
           <a:p>
             <a:pPr algn="l"/>
             <a:r>
-              <a:rPr sz="2000" b="0" i="0">
+              <a:rPr sz="2000" b="0" i="0" dirty="0">
                 <a:solidFill>
                   <a:srgbClr val="2C2C2C"/>
                 </a:solidFill>
@@ -6868,7 +6953,7 @@
         </p:nvSpPr>
         <p:spPr>
           <a:xfrm>
-            <a:off x="365760" y="5010912"/>
+            <a:off x="365760" y="4355306"/>
             <a:ext cx="10972800" cy="502920"/>
           </a:xfrm>
           <a:prstGeom prst="rect">
@@ -6884,7 +6969,7 @@
           <a:p>
             <a:pPr algn="l"/>
             <a:r>
-              <a:rPr sz="2000" b="0" i="0">
+              <a:rPr sz="2000" b="0" i="0" dirty="0">
                 <a:solidFill>
                   <a:srgbClr val="2C2C2C"/>
                 </a:solidFill>
@@ -6902,7 +6987,7 @@
         </p:nvSpPr>
         <p:spPr>
           <a:xfrm>
-            <a:off x="365760" y="5559552"/>
+            <a:off x="365760" y="4858226"/>
             <a:ext cx="10972800" cy="502920"/>
           </a:xfrm>
           <a:prstGeom prst="rect">
@@ -6918,7 +7003,7 @@
           <a:p>
             <a:pPr algn="l"/>
             <a:r>
-              <a:rPr sz="2000" b="0" i="0">
+              <a:rPr sz="2000" b="0" i="0" dirty="0">
                 <a:solidFill>
                   <a:srgbClr val="2C2C2C"/>
                 </a:solidFill>
@@ -6936,7 +7021,7 @@
         </p:nvSpPr>
         <p:spPr>
           <a:xfrm>
-            <a:off x="365760" y="6108192"/>
+            <a:off x="365760" y="5349240"/>
             <a:ext cx="10972800" cy="365760"/>
           </a:xfrm>
           <a:prstGeom prst="rect">
@@ -6952,7 +7037,7 @@
           <a:p>
             <a:pPr algn="l"/>
             <a:r>
-              <a:rPr sz="2000" b="1" i="0">
+              <a:rPr sz="2000" b="1" i="0" dirty="0">
                 <a:solidFill>
                   <a:srgbClr val="245C94"/>
                 </a:solidFill>
@@ -6970,7 +7055,7 @@
         </p:nvSpPr>
         <p:spPr>
           <a:xfrm>
-            <a:off x="365760" y="6547104"/>
+            <a:off x="365760" y="5826448"/>
             <a:ext cx="10972800" cy="502920"/>
           </a:xfrm>
           <a:prstGeom prst="rect">
@@ -6986,13 +7071,42 @@
           <a:p>
             <a:pPr algn="l"/>
             <a:r>
-              <a:rPr sz="2000" b="0" i="0">
+              <a:rPr sz="2000" b="0" i="0" dirty="0">
                 <a:solidFill>
                   <a:srgbClr val="2C2C2C"/>
                 </a:solidFill>
               </a:rPr>
-              <a:t>• Graph G=(V,E),  agents A={1..k},  starts s_i,  goals g_i</a:t>
-            </a:r>
+              <a:t>• Graph G=(V,E),  agents A={1..k},  starts </a:t>
+            </a:r>
+            <a:r>
+              <a:rPr sz="2000" b="0" i="0" dirty="0" err="1">
+                <a:solidFill>
+                  <a:srgbClr val="2C2C2C"/>
+                </a:solidFill>
+              </a:rPr>
+              <a:t>s_i</a:t>
+            </a:r>
+            <a:r>
+              <a:rPr sz="2000" b="0" i="0" dirty="0">
+                <a:solidFill>
+                  <a:srgbClr val="2C2C2C"/>
+                </a:solidFill>
+              </a:rPr>
+              <a:t>,  goals </a:t>
+            </a:r>
+            <a:r>
+              <a:rPr sz="2000" b="0" i="0" dirty="0" err="1">
+                <a:solidFill>
+                  <a:srgbClr val="2C2C2C"/>
+                </a:solidFill>
+              </a:rPr>
+              <a:t>g_i</a:t>
+            </a:r>
+            <a:endParaRPr sz="2000" b="0" i="0" dirty="0">
+              <a:solidFill>
+                <a:srgbClr val="2C2C2C"/>
+              </a:solidFill>
+            </a:endParaRPr>
           </a:p>
         </p:txBody>
       </p:sp>
@@ -7004,7 +7118,7 @@
         </p:nvSpPr>
         <p:spPr>
           <a:xfrm>
-            <a:off x="365760" y="7095744"/>
+            <a:off x="365760" y="6277864"/>
             <a:ext cx="10972800" cy="502920"/>
           </a:xfrm>
           <a:prstGeom prst="rect">
@@ -7020,7 +7134,7 @@
           <a:p>
             <a:pPr algn="l"/>
             <a:r>
-              <a:rPr sz="2000" b="0" i="0">
+              <a:rPr sz="2000" b="0" i="0" dirty="0">
                 <a:solidFill>
                   <a:srgbClr val="2C2C2C"/>
                 </a:solidFill>
@@ -7039,7 +7153,7 @@
 </file>
 
 <file path=ppt/slides/slide3.xml><?xml version="1.0" encoding="utf-8"?>
-<p:sld xmlns:a="http://schemas.openxmlformats.org/drawingml/2006/main" xmlns:p="http://schemas.openxmlformats.org/presentationml/2006/main" xmlns:r="http://schemas.openxmlformats.org/officeDocument/2006/relationships">
+<p:sld xmlns:a="http://schemas.openxmlformats.org/drawingml/2006/main" xmlns:r="http://schemas.openxmlformats.org/officeDocument/2006/relationships" xmlns:p="http://schemas.openxmlformats.org/presentationml/2006/main">
   <p:cSld>
     <p:spTree>
       <p:nvGrpSpPr>
@@ -7047,7 +7161,14 @@
         <p:cNvGrpSpPr/>
         <p:nvPr/>
       </p:nvGrpSpPr>
-      <p:grpSpPr/>
+      <p:grpSpPr>
+        <a:xfrm>
+          <a:off x="0" y="0"/>
+          <a:ext cx="0" cy="0"/>
+          <a:chOff x="0" y="0"/>
+          <a:chExt cx="0" cy="0"/>
+        </a:xfrm>
+      </p:grpSpPr>
       <p:sp>
         <p:nvSpPr>
           <p:cNvPr id="2" name="Rectangle 1"/>
@@ -7088,6 +7209,7 @@
           <a:lstStyle/>
           <a:p>
             <a:pPr algn="ctr"/>
+            <a:endParaRPr/>
           </a:p>
         </p:txBody>
       </p:sp>
@@ -7165,6 +7287,7 @@
           <a:lstStyle/>
           <a:p>
             <a:pPr algn="ctr"/>
+            <a:endParaRPr/>
           </a:p>
         </p:txBody>
       </p:sp>
@@ -7242,6 +7365,7 @@
           <a:lstStyle/>
           <a:p>
             <a:pPr algn="ctr"/>
+            <a:endParaRPr/>
           </a:p>
         </p:txBody>
       </p:sp>
@@ -7253,7 +7377,7 @@
         </p:nvSpPr>
         <p:spPr>
           <a:xfrm>
-            <a:off x="365760" y="1828800"/>
+            <a:off x="378460" y="1524000"/>
             <a:ext cx="10972800" cy="502920"/>
           </a:xfrm>
           <a:prstGeom prst="rect">
@@ -7287,7 +7411,7 @@
         </p:nvSpPr>
         <p:spPr>
           <a:xfrm>
-            <a:off x="365760" y="2377440"/>
+            <a:off x="378460" y="2072640"/>
             <a:ext cx="10972800" cy="502920"/>
           </a:xfrm>
           <a:prstGeom prst="rect">
@@ -7321,7 +7445,7 @@
         </p:nvSpPr>
         <p:spPr>
           <a:xfrm>
-            <a:off x="365760" y="2926080"/>
+            <a:off x="378460" y="2621280"/>
             <a:ext cx="10972800" cy="365760"/>
           </a:xfrm>
           <a:prstGeom prst="rect">
@@ -7355,7 +7479,7 @@
         </p:nvSpPr>
         <p:spPr>
           <a:xfrm>
-            <a:off x="365760" y="3364992"/>
+            <a:off x="378460" y="3060192"/>
             <a:ext cx="10972800" cy="502920"/>
           </a:xfrm>
           <a:prstGeom prst="rect">
@@ -7389,7 +7513,7 @@
         </p:nvSpPr>
         <p:spPr>
           <a:xfrm>
-            <a:off x="365760" y="3913632"/>
+            <a:off x="378460" y="3608832"/>
             <a:ext cx="10972800" cy="502920"/>
           </a:xfrm>
           <a:prstGeom prst="rect">
@@ -7423,7 +7547,7 @@
         </p:nvSpPr>
         <p:spPr>
           <a:xfrm>
-            <a:off x="365760" y="4462272"/>
+            <a:off x="378460" y="4157472"/>
             <a:ext cx="10972800" cy="502920"/>
           </a:xfrm>
           <a:prstGeom prst="rect">
@@ -7457,7 +7581,7 @@
         </p:nvSpPr>
         <p:spPr>
           <a:xfrm>
-            <a:off x="365760" y="5010912"/>
+            <a:off x="378460" y="4528312"/>
             <a:ext cx="10972800" cy="365760"/>
           </a:xfrm>
           <a:prstGeom prst="rect">
@@ -7473,7 +7597,7 @@
           <a:p>
             <a:pPr algn="l"/>
             <a:r>
-              <a:rPr sz="2000" b="1" i="0">
+              <a:rPr sz="2000" b="1" i="0" dirty="0">
                 <a:solidFill>
                   <a:srgbClr val="245C94"/>
                 </a:solidFill>
@@ -7491,7 +7615,7 @@
         </p:nvSpPr>
         <p:spPr>
           <a:xfrm>
-            <a:off x="365760" y="5449823"/>
+            <a:off x="378460" y="4894072"/>
             <a:ext cx="10972800" cy="502920"/>
           </a:xfrm>
           <a:prstGeom prst="rect">
@@ -7525,7 +7649,7 @@
         </p:nvSpPr>
         <p:spPr>
           <a:xfrm>
-            <a:off x="365760" y="5998463"/>
+            <a:off x="378460" y="5296155"/>
             <a:ext cx="10972800" cy="502920"/>
           </a:xfrm>
           <a:prstGeom prst="rect">
@@ -7541,7 +7665,7 @@
           <a:p>
             <a:pPr algn="l"/>
             <a:r>
-              <a:rPr sz="2000" b="0" i="0">
+              <a:rPr sz="2000" b="0" i="0" dirty="0">
                 <a:solidFill>
                   <a:srgbClr val="2C2C2C"/>
                 </a:solidFill>
@@ -7559,7 +7683,7 @@
         </p:nvSpPr>
         <p:spPr>
           <a:xfrm>
-            <a:off x="365760" y="6547103"/>
+            <a:off x="378460" y="5766055"/>
             <a:ext cx="10972800" cy="365760"/>
           </a:xfrm>
           <a:prstGeom prst="rect">
@@ -7575,7 +7699,7 @@
           <a:p>
             <a:pPr algn="l"/>
             <a:r>
-              <a:rPr sz="2000" b="1" i="0">
+              <a:rPr sz="2000" b="1" i="0" dirty="0">
                 <a:solidFill>
                   <a:srgbClr val="245C94"/>
                 </a:solidFill>
@@ -7593,7 +7717,7 @@
         </p:nvSpPr>
         <p:spPr>
           <a:xfrm>
-            <a:off x="365760" y="6986015"/>
+            <a:off x="378460" y="6162550"/>
             <a:ext cx="10972800" cy="502920"/>
           </a:xfrm>
           <a:prstGeom prst="rect">
@@ -7609,7 +7733,7 @@
           <a:p>
             <a:pPr algn="l"/>
             <a:r>
-              <a:rPr sz="2000" b="0" i="0">
+              <a:rPr sz="2000" b="0" i="0" dirty="0">
                 <a:solidFill>
                   <a:srgbClr val="2C2C2C"/>
                 </a:solidFill>
@@ -7627,7 +7751,7 @@
         </p:nvSpPr>
         <p:spPr>
           <a:xfrm>
-            <a:off x="365760" y="7534655"/>
+            <a:off x="378460" y="6510275"/>
             <a:ext cx="10972800" cy="502920"/>
           </a:xfrm>
           <a:prstGeom prst="rect">
@@ -7643,7 +7767,7 @@
           <a:p>
             <a:pPr algn="l"/>
             <a:r>
-              <a:rPr sz="2000" b="0" i="0">
+              <a:rPr sz="2000" b="0" i="0" dirty="0">
                 <a:solidFill>
                   <a:srgbClr val="2C2C2C"/>
                 </a:solidFill>
@@ -7662,7 +7786,7 @@
 </file>
 
 <file path=ppt/slides/slide4.xml><?xml version="1.0" encoding="utf-8"?>
-<p:sld xmlns:a="http://schemas.openxmlformats.org/drawingml/2006/main" xmlns:p="http://schemas.openxmlformats.org/presentationml/2006/main" xmlns:r="http://schemas.openxmlformats.org/officeDocument/2006/relationships">
+<p:sld xmlns:a="http://schemas.openxmlformats.org/drawingml/2006/main" xmlns:r="http://schemas.openxmlformats.org/officeDocument/2006/relationships" xmlns:p="http://schemas.openxmlformats.org/presentationml/2006/main">
   <p:cSld>
     <p:spTree>
       <p:nvGrpSpPr>
@@ -7670,7 +7794,14 @@
         <p:cNvGrpSpPr/>
         <p:nvPr/>
       </p:nvGrpSpPr>
-      <p:grpSpPr/>
+      <p:grpSpPr>
+        <a:xfrm>
+          <a:off x="0" y="0"/>
+          <a:ext cx="0" cy="0"/>
+          <a:chOff x="0" y="0"/>
+          <a:chExt cx="0" cy="0"/>
+        </a:xfrm>
+      </p:grpSpPr>
       <p:sp>
         <p:nvSpPr>
           <p:cNvPr id="2" name="Rectangle 1"/>
@@ -7711,6 +7842,7 @@
           <a:lstStyle/>
           <a:p>
             <a:pPr algn="ctr"/>
+            <a:endParaRPr/>
           </a:p>
         </p:txBody>
       </p:sp>
@@ -7788,6 +7920,7 @@
           <a:lstStyle/>
           <a:p>
             <a:pPr algn="ctr"/>
+            <a:endParaRPr/>
           </a:p>
         </p:txBody>
       </p:sp>
@@ -7865,6 +7998,7 @@
           <a:lstStyle/>
           <a:p>
             <a:pPr algn="ctr"/>
+            <a:endParaRPr/>
           </a:p>
         </p:txBody>
       </p:sp>
@@ -7876,7 +8010,7 @@
         </p:nvSpPr>
         <p:spPr>
           <a:xfrm>
-            <a:off x="365760" y="1828800"/>
+            <a:off x="365760" y="1511300"/>
             <a:ext cx="10972800" cy="365760"/>
           </a:xfrm>
           <a:prstGeom prst="rect">
@@ -7910,7 +8044,7 @@
         </p:nvSpPr>
         <p:spPr>
           <a:xfrm>
-            <a:off x="365760" y="2267712"/>
+            <a:off x="365760" y="1950212"/>
             <a:ext cx="10972800" cy="502920"/>
           </a:xfrm>
           <a:prstGeom prst="rect">
@@ -7944,7 +8078,7 @@
         </p:nvSpPr>
         <p:spPr>
           <a:xfrm>
-            <a:off x="365760" y="2816352"/>
+            <a:off x="365760" y="2498852"/>
             <a:ext cx="10972800" cy="365760"/>
           </a:xfrm>
           <a:prstGeom prst="rect">
@@ -7978,7 +8112,7 @@
         </p:nvSpPr>
         <p:spPr>
           <a:xfrm>
-            <a:off x="365760" y="3255264"/>
+            <a:off x="365760" y="2937764"/>
             <a:ext cx="10972800" cy="502920"/>
           </a:xfrm>
           <a:prstGeom prst="rect">
@@ -8012,7 +8146,7 @@
         </p:nvSpPr>
         <p:spPr>
           <a:xfrm>
-            <a:off x="365760" y="3803904"/>
+            <a:off x="365760" y="3486404"/>
             <a:ext cx="10972800" cy="365760"/>
           </a:xfrm>
           <a:prstGeom prst="rect">
@@ -8046,7 +8180,7 @@
         </p:nvSpPr>
         <p:spPr>
           <a:xfrm>
-            <a:off x="365760" y="4242816"/>
+            <a:off x="365760" y="3925316"/>
             <a:ext cx="10972800" cy="502920"/>
           </a:xfrm>
           <a:prstGeom prst="rect">
@@ -8080,7 +8214,7 @@
         </p:nvSpPr>
         <p:spPr>
           <a:xfrm>
-            <a:off x="365760" y="4791456"/>
+            <a:off x="365760" y="4473956"/>
             <a:ext cx="10972800" cy="365760"/>
           </a:xfrm>
           <a:prstGeom prst="rect">
@@ -8114,7 +8248,7 @@
         </p:nvSpPr>
         <p:spPr>
           <a:xfrm>
-            <a:off x="365760" y="5230368"/>
+            <a:off x="365760" y="4912868"/>
             <a:ext cx="10972800" cy="502920"/>
           </a:xfrm>
           <a:prstGeom prst="rect">
@@ -8148,7 +8282,7 @@
         </p:nvSpPr>
         <p:spPr>
           <a:xfrm>
-            <a:off x="365760" y="5779008"/>
+            <a:off x="365760" y="5461508"/>
             <a:ext cx="10972800" cy="365760"/>
           </a:xfrm>
           <a:prstGeom prst="rect">
@@ -8182,7 +8316,7 @@
         </p:nvSpPr>
         <p:spPr>
           <a:xfrm>
-            <a:off x="365760" y="6217920"/>
+            <a:off x="365760" y="5900420"/>
             <a:ext cx="10972800" cy="502920"/>
           </a:xfrm>
           <a:prstGeom prst="rect">
@@ -8216,7 +8350,7 @@
         </p:nvSpPr>
         <p:spPr>
           <a:xfrm>
-            <a:off x="365760" y="6766560"/>
+            <a:off x="365760" y="6449060"/>
             <a:ext cx="10972800" cy="502920"/>
           </a:xfrm>
           <a:prstGeom prst="rect">
@@ -8251,7 +8385,7 @@
 </file>
 
 <file path=ppt/slides/slide5.xml><?xml version="1.0" encoding="utf-8"?>
-<p:sld xmlns:a="http://schemas.openxmlformats.org/drawingml/2006/main" xmlns:p="http://schemas.openxmlformats.org/presentationml/2006/main" xmlns:r="http://schemas.openxmlformats.org/officeDocument/2006/relationships">
+<p:sld xmlns:a="http://schemas.openxmlformats.org/drawingml/2006/main" xmlns:r="http://schemas.openxmlformats.org/officeDocument/2006/relationships" xmlns:p="http://schemas.openxmlformats.org/presentationml/2006/main">
   <p:cSld>
     <p:spTree>
       <p:nvGrpSpPr>
@@ -8259,7 +8393,14 @@
         <p:cNvGrpSpPr/>
         <p:nvPr/>
       </p:nvGrpSpPr>
-      <p:grpSpPr/>
+      <p:grpSpPr>
+        <a:xfrm>
+          <a:off x="0" y="0"/>
+          <a:ext cx="0" cy="0"/>
+          <a:chOff x="0" y="0"/>
+          <a:chExt cx="0" cy="0"/>
+        </a:xfrm>
+      </p:grpSpPr>
       <p:sp>
         <p:nvSpPr>
           <p:cNvPr id="2" name="Rectangle 1"/>
@@ -8300,6 +8441,7 @@
           <a:lstStyle/>
           <a:p>
             <a:pPr algn="ctr"/>
+            <a:endParaRPr/>
           </a:p>
         </p:txBody>
       </p:sp>
@@ -8377,6 +8519,7 @@
           <a:lstStyle/>
           <a:p>
             <a:pPr algn="ctr"/>
+            <a:endParaRPr/>
           </a:p>
         </p:txBody>
       </p:sp>
@@ -8454,6 +8597,7 @@
           <a:lstStyle/>
           <a:p>
             <a:pPr algn="ctr"/>
+            <a:endParaRPr/>
           </a:p>
         </p:txBody>
       </p:sp>
@@ -8465,7 +8609,7 @@
         </p:nvSpPr>
         <p:spPr>
           <a:xfrm>
-            <a:off x="365760" y="1828800"/>
+            <a:off x="365760" y="1549400"/>
             <a:ext cx="10972800" cy="365760"/>
           </a:xfrm>
           <a:prstGeom prst="rect">
@@ -8499,7 +8643,7 @@
         </p:nvSpPr>
         <p:spPr>
           <a:xfrm>
-            <a:off x="365760" y="2267712"/>
+            <a:off x="365760" y="1988312"/>
             <a:ext cx="10972800" cy="502920"/>
           </a:xfrm>
           <a:prstGeom prst="rect">
@@ -8533,7 +8677,7 @@
         </p:nvSpPr>
         <p:spPr>
           <a:xfrm>
-            <a:off x="365760" y="2816352"/>
+            <a:off x="365760" y="2536952"/>
             <a:ext cx="10972800" cy="502920"/>
           </a:xfrm>
           <a:prstGeom prst="rect">
@@ -8567,7 +8711,7 @@
         </p:nvSpPr>
         <p:spPr>
           <a:xfrm>
-            <a:off x="365760" y="3364992"/>
+            <a:off x="365760" y="3085592"/>
             <a:ext cx="10972800" cy="502920"/>
           </a:xfrm>
           <a:prstGeom prst="rect">
@@ -8601,7 +8745,7 @@
         </p:nvSpPr>
         <p:spPr>
           <a:xfrm>
-            <a:off x="365760" y="3913632"/>
+            <a:off x="365760" y="3634232"/>
             <a:ext cx="10972800" cy="365760"/>
           </a:xfrm>
           <a:prstGeom prst="rect">
@@ -8635,7 +8779,7 @@
         </p:nvSpPr>
         <p:spPr>
           <a:xfrm>
-            <a:off x="365760" y="4352544"/>
+            <a:off x="365760" y="4073144"/>
             <a:ext cx="10972800" cy="502920"/>
           </a:xfrm>
           <a:prstGeom prst="rect">
@@ -8669,7 +8813,7 @@
         </p:nvSpPr>
         <p:spPr>
           <a:xfrm>
-            <a:off x="365760" y="4901183"/>
+            <a:off x="365760" y="4431283"/>
             <a:ext cx="10972800" cy="502920"/>
           </a:xfrm>
           <a:prstGeom prst="rect">
@@ -8685,7 +8829,7 @@
           <a:p>
             <a:pPr algn="l"/>
             <a:r>
-              <a:rPr sz="2000" b="0" i="0">
+              <a:rPr sz="2000" b="0" i="0" dirty="0">
                 <a:solidFill>
                   <a:srgbClr val="2C2C2C"/>
                 </a:solidFill>
@@ -8703,7 +8847,7 @@
         </p:nvSpPr>
         <p:spPr>
           <a:xfrm>
-            <a:off x="365760" y="5449823"/>
+            <a:off x="365760" y="4840223"/>
             <a:ext cx="10972800" cy="502920"/>
           </a:xfrm>
           <a:prstGeom prst="rect">
@@ -8719,7 +8863,7 @@
           <a:p>
             <a:pPr algn="l"/>
             <a:r>
-              <a:rPr sz="2000" b="0" i="0">
+              <a:rPr sz="2000" b="0" i="0" dirty="0">
                 <a:solidFill>
                   <a:srgbClr val="2C2C2C"/>
                 </a:solidFill>
@@ -8737,7 +8881,7 @@
         </p:nvSpPr>
         <p:spPr>
           <a:xfrm>
-            <a:off x="365760" y="5998463"/>
+            <a:off x="365760" y="5261863"/>
             <a:ext cx="10972800" cy="365760"/>
           </a:xfrm>
           <a:prstGeom prst="rect">
@@ -8753,7 +8897,7 @@
           <a:p>
             <a:pPr algn="l"/>
             <a:r>
-              <a:rPr sz="2000" b="1" i="0">
+              <a:rPr sz="2000" b="1" i="0" dirty="0">
                 <a:solidFill>
                   <a:srgbClr val="245C94"/>
                 </a:solidFill>
@@ -8771,7 +8915,7 @@
         </p:nvSpPr>
         <p:spPr>
           <a:xfrm>
-            <a:off x="365760" y="6437375"/>
+            <a:off x="365760" y="5761735"/>
             <a:ext cx="10972800" cy="502920"/>
           </a:xfrm>
           <a:prstGeom prst="rect">
@@ -8787,7 +8931,7 @@
           <a:p>
             <a:pPr algn="l"/>
             <a:r>
-              <a:rPr sz="2000" b="0" i="0">
+              <a:rPr sz="2000" b="0" i="0" dirty="0">
                 <a:solidFill>
                   <a:srgbClr val="2C2C2C"/>
                 </a:solidFill>
@@ -8805,7 +8949,7 @@
         </p:nvSpPr>
         <p:spPr>
           <a:xfrm>
-            <a:off x="365760" y="6986015"/>
+            <a:off x="365760" y="6140196"/>
             <a:ext cx="10972800" cy="502920"/>
           </a:xfrm>
           <a:prstGeom prst="rect">
@@ -8821,7 +8965,7 @@
           <a:p>
             <a:pPr algn="l"/>
             <a:r>
-              <a:rPr sz="2000" b="0" i="0">
+              <a:rPr sz="2000" b="0" i="0" dirty="0">
                 <a:solidFill>
                   <a:srgbClr val="2C2C2C"/>
                 </a:solidFill>
@@ -8839,7 +8983,7 @@
         </p:nvSpPr>
         <p:spPr>
           <a:xfrm>
-            <a:off x="365760" y="7534655"/>
+            <a:off x="365760" y="6489192"/>
             <a:ext cx="10972800" cy="502920"/>
           </a:xfrm>
           <a:prstGeom prst="rect">
@@ -8874,7 +9018,7 @@
 </file>
 
 <file path=ppt/slides/slide6.xml><?xml version="1.0" encoding="utf-8"?>
-<p:sld xmlns:a="http://schemas.openxmlformats.org/drawingml/2006/main" xmlns:p="http://schemas.openxmlformats.org/presentationml/2006/main" xmlns:r="http://schemas.openxmlformats.org/officeDocument/2006/relationships">
+<p:sld xmlns:a="http://schemas.openxmlformats.org/drawingml/2006/main" xmlns:r="http://schemas.openxmlformats.org/officeDocument/2006/relationships" xmlns:p="http://schemas.openxmlformats.org/presentationml/2006/main">
   <p:cSld>
     <p:spTree>
       <p:nvGrpSpPr>
@@ -8882,7 +9026,14 @@
         <p:cNvGrpSpPr/>
         <p:nvPr/>
       </p:nvGrpSpPr>
-      <p:grpSpPr/>
+      <p:grpSpPr>
+        <a:xfrm>
+          <a:off x="0" y="0"/>
+          <a:ext cx="0" cy="0"/>
+          <a:chOff x="0" y="0"/>
+          <a:chExt cx="0" cy="0"/>
+        </a:xfrm>
+      </p:grpSpPr>
       <p:sp>
         <p:nvSpPr>
           <p:cNvPr id="2" name="Rectangle 1"/>
@@ -8923,6 +9074,7 @@
           <a:lstStyle/>
           <a:p>
             <a:pPr algn="ctr"/>
+            <a:endParaRPr/>
           </a:p>
         </p:txBody>
       </p:sp>
@@ -9000,6 +9152,7 @@
           <a:lstStyle/>
           <a:p>
             <a:pPr algn="ctr"/>
+            <a:endParaRPr/>
           </a:p>
         </p:txBody>
       </p:sp>
@@ -9077,6 +9230,7 @@
           <a:lstStyle/>
           <a:p>
             <a:pPr algn="ctr"/>
+            <a:endParaRPr/>
           </a:p>
         </p:txBody>
       </p:sp>
@@ -9088,7 +9242,7 @@
         </p:nvSpPr>
         <p:spPr>
           <a:xfrm>
-            <a:off x="365760" y="1828800"/>
+            <a:off x="365760" y="1485900"/>
             <a:ext cx="10972800" cy="502920"/>
           </a:xfrm>
           <a:prstGeom prst="rect">
@@ -9122,7 +9276,7 @@
         </p:nvSpPr>
         <p:spPr>
           <a:xfrm>
-            <a:off x="365760" y="2377440"/>
+            <a:off x="365760" y="2034540"/>
             <a:ext cx="10972800" cy="502920"/>
           </a:xfrm>
           <a:prstGeom prst="rect">
@@ -9156,7 +9310,7 @@
         </p:nvSpPr>
         <p:spPr>
           <a:xfrm>
-            <a:off x="365760" y="2926080"/>
+            <a:off x="365760" y="2583180"/>
             <a:ext cx="10972800" cy="365760"/>
           </a:xfrm>
           <a:prstGeom prst="rect">
@@ -9190,7 +9344,7 @@
         </p:nvSpPr>
         <p:spPr>
           <a:xfrm>
-            <a:off x="365760" y="3364992"/>
+            <a:off x="365760" y="3022092"/>
             <a:ext cx="10972800" cy="502920"/>
           </a:xfrm>
           <a:prstGeom prst="rect">
@@ -9224,7 +9378,7 @@
         </p:nvSpPr>
         <p:spPr>
           <a:xfrm>
-            <a:off x="365760" y="3913632"/>
+            <a:off x="365760" y="3570732"/>
             <a:ext cx="10972800" cy="502920"/>
           </a:xfrm>
           <a:prstGeom prst="rect">
@@ -9258,7 +9412,7 @@
         </p:nvSpPr>
         <p:spPr>
           <a:xfrm>
-            <a:off x="365760" y="4462272"/>
+            <a:off x="365760" y="4119372"/>
             <a:ext cx="10972800" cy="365760"/>
           </a:xfrm>
           <a:prstGeom prst="rect">
@@ -9292,7 +9446,7 @@
         </p:nvSpPr>
         <p:spPr>
           <a:xfrm>
-            <a:off x="365760" y="4901183"/>
+            <a:off x="365760" y="4558283"/>
             <a:ext cx="10972800" cy="502920"/>
           </a:xfrm>
           <a:prstGeom prst="rect">
@@ -9326,7 +9480,7 @@
         </p:nvSpPr>
         <p:spPr>
           <a:xfrm>
-            <a:off x="365760" y="5449823"/>
+            <a:off x="365760" y="5106923"/>
             <a:ext cx="10972800" cy="502920"/>
           </a:xfrm>
           <a:prstGeom prst="rect">
@@ -9360,7 +9514,7 @@
         </p:nvSpPr>
         <p:spPr>
           <a:xfrm>
-            <a:off x="365760" y="5998463"/>
+            <a:off x="365760" y="5655563"/>
             <a:ext cx="10972800" cy="365760"/>
           </a:xfrm>
           <a:prstGeom prst="rect">
@@ -9394,7 +9548,7 @@
         </p:nvSpPr>
         <p:spPr>
           <a:xfrm>
-            <a:off x="365760" y="6437375"/>
+            <a:off x="365760" y="6094475"/>
             <a:ext cx="10972800" cy="502920"/>
           </a:xfrm>
           <a:prstGeom prst="rect">
@@ -9428,7 +9582,7 @@
         </p:nvSpPr>
         <p:spPr>
           <a:xfrm>
-            <a:off x="365760" y="6986015"/>
+            <a:off x="365760" y="6428231"/>
             <a:ext cx="10972800" cy="502920"/>
           </a:xfrm>
           <a:prstGeom prst="rect">
@@ -9444,7 +9598,7 @@
           <a:p>
             <a:pPr algn="l"/>
             <a:r>
-              <a:rPr sz="2000" b="0" i="0">
+              <a:rPr sz="2000" b="0" i="0" dirty="0">
                 <a:solidFill>
                   <a:srgbClr val="2C2C2C"/>
                 </a:solidFill>
@@ -9463,7 +9617,7 @@
 </file>
 
 <file path=ppt/slides/slide7.xml><?xml version="1.0" encoding="utf-8"?>
-<p:sld xmlns:a="http://schemas.openxmlformats.org/drawingml/2006/main" xmlns:p="http://schemas.openxmlformats.org/presentationml/2006/main" xmlns:r="http://schemas.openxmlformats.org/officeDocument/2006/relationships">
+<p:sld xmlns:a="http://schemas.openxmlformats.org/drawingml/2006/main" xmlns:r="http://schemas.openxmlformats.org/officeDocument/2006/relationships" xmlns:p="http://schemas.openxmlformats.org/presentationml/2006/main">
   <p:cSld>
     <p:spTree>
       <p:nvGrpSpPr>
@@ -9471,7 +9625,14 @@
         <p:cNvGrpSpPr/>
         <p:nvPr/>
       </p:nvGrpSpPr>
-      <p:grpSpPr/>
+      <p:grpSpPr>
+        <a:xfrm>
+          <a:off x="0" y="0"/>
+          <a:ext cx="0" cy="0"/>
+          <a:chOff x="0" y="0"/>
+          <a:chExt cx="0" cy="0"/>
+        </a:xfrm>
+      </p:grpSpPr>
       <p:sp>
         <p:nvSpPr>
           <p:cNvPr id="2" name="Rectangle 1"/>
@@ -9512,6 +9673,7 @@
           <a:lstStyle/>
           <a:p>
             <a:pPr algn="ctr"/>
+            <a:endParaRPr/>
           </a:p>
         </p:txBody>
       </p:sp>
@@ -9589,6 +9751,7 @@
           <a:lstStyle/>
           <a:p>
             <a:pPr algn="ctr"/>
+            <a:endParaRPr/>
           </a:p>
         </p:txBody>
       </p:sp>
@@ -9666,6 +9829,7 @@
           <a:lstStyle/>
           <a:p>
             <a:pPr algn="ctr"/>
+            <a:endParaRPr/>
           </a:p>
         </p:txBody>
       </p:sp>
@@ -9677,7 +9841,7 @@
         </p:nvSpPr>
         <p:spPr>
           <a:xfrm>
-            <a:off x="365760" y="1828800"/>
+            <a:off x="365760" y="1536700"/>
             <a:ext cx="10972800" cy="502920"/>
           </a:xfrm>
           <a:prstGeom prst="rect">
@@ -9711,7 +9875,7 @@
         </p:nvSpPr>
         <p:spPr>
           <a:xfrm>
-            <a:off x="365760" y="2377440"/>
+            <a:off x="365760" y="2085340"/>
             <a:ext cx="10972800" cy="502920"/>
           </a:xfrm>
           <a:prstGeom prst="rect">
@@ -9745,7 +9909,7 @@
         </p:nvSpPr>
         <p:spPr>
           <a:xfrm>
-            <a:off x="365760" y="2926080"/>
+            <a:off x="365760" y="2633980"/>
             <a:ext cx="10972800" cy="502920"/>
           </a:xfrm>
           <a:prstGeom prst="rect">
@@ -9779,7 +9943,7 @@
         </p:nvSpPr>
         <p:spPr>
           <a:xfrm>
-            <a:off x="365760" y="3474720"/>
+            <a:off x="365760" y="3182620"/>
             <a:ext cx="10972800" cy="502920"/>
           </a:xfrm>
           <a:prstGeom prst="rect">
@@ -9813,7 +9977,7 @@
         </p:nvSpPr>
         <p:spPr>
           <a:xfrm>
-            <a:off x="457200" y="4023360"/>
+            <a:off x="457200" y="3731260"/>
             <a:ext cx="10972800" cy="457200"/>
           </a:xfrm>
           <a:prstGeom prst="rect">
@@ -9847,7 +10011,7 @@
         </p:nvSpPr>
         <p:spPr>
           <a:xfrm>
-            <a:off x="457200" y="4498848"/>
+            <a:off x="457200" y="4206748"/>
             <a:ext cx="10972800" cy="457200"/>
           </a:xfrm>
           <a:prstGeom prst="rect">
@@ -9881,7 +10045,7 @@
         </p:nvSpPr>
         <p:spPr>
           <a:xfrm>
-            <a:off x="365760" y="4974336"/>
+            <a:off x="365760" y="4682236"/>
             <a:ext cx="10972800" cy="502920"/>
           </a:xfrm>
           <a:prstGeom prst="rect">
@@ -9915,7 +10079,7 @@
         </p:nvSpPr>
         <p:spPr>
           <a:xfrm>
-            <a:off x="365760" y="5522975"/>
+            <a:off x="365760" y="5230875"/>
             <a:ext cx="10972800" cy="502920"/>
           </a:xfrm>
           <a:prstGeom prst="rect">
@@ -9949,7 +10113,7 @@
         </p:nvSpPr>
         <p:spPr>
           <a:xfrm>
-            <a:off x="365760" y="6071615"/>
+            <a:off x="365760" y="5628640"/>
             <a:ext cx="10972800" cy="502920"/>
           </a:xfrm>
           <a:prstGeom prst="rect">
@@ -9965,7 +10129,7 @@
           <a:p>
             <a:pPr algn="l"/>
             <a:r>
-              <a:rPr sz="2000" b="0" i="0">
+              <a:rPr sz="2000" b="0" i="0" dirty="0">
                 <a:solidFill>
                   <a:srgbClr val="2C2C2C"/>
                 </a:solidFill>
@@ -9983,7 +10147,7 @@
         </p:nvSpPr>
         <p:spPr>
           <a:xfrm>
-            <a:off x="365760" y="6620255"/>
+            <a:off x="365760" y="6083553"/>
             <a:ext cx="10972800" cy="365760"/>
           </a:xfrm>
           <a:prstGeom prst="rect">
@@ -9999,7 +10163,7 @@
           <a:p>
             <a:pPr algn="l"/>
             <a:r>
-              <a:rPr sz="2000" b="1" i="0">
+              <a:rPr sz="2000" b="1" i="0" dirty="0">
                 <a:solidFill>
                   <a:srgbClr val="245C94"/>
                 </a:solidFill>
@@ -10017,7 +10181,7 @@
         </p:nvSpPr>
         <p:spPr>
           <a:xfrm>
-            <a:off x="365760" y="7059167"/>
+            <a:off x="365760" y="6400799"/>
             <a:ext cx="10972800" cy="502920"/>
           </a:xfrm>
           <a:prstGeom prst="rect">
@@ -10033,7 +10197,7 @@
           <a:p>
             <a:pPr algn="l"/>
             <a:r>
-              <a:rPr sz="2000" b="0" i="0">
+              <a:rPr sz="2000" b="0" i="0" dirty="0">
                 <a:solidFill>
                   <a:srgbClr val="2C2C2C"/>
                 </a:solidFill>
@@ -10052,7 +10216,7 @@
 </file>
 
 <file path=ppt/slides/slide8.xml><?xml version="1.0" encoding="utf-8"?>
-<p:sld xmlns:a="http://schemas.openxmlformats.org/drawingml/2006/main" xmlns:p="http://schemas.openxmlformats.org/presentationml/2006/main" xmlns:r="http://schemas.openxmlformats.org/officeDocument/2006/relationships">
+<p:sld xmlns:a="http://schemas.openxmlformats.org/drawingml/2006/main" xmlns:r="http://schemas.openxmlformats.org/officeDocument/2006/relationships" xmlns:p="http://schemas.openxmlformats.org/presentationml/2006/main">
   <p:cSld>
     <p:spTree>
       <p:nvGrpSpPr>
@@ -10060,7 +10224,14 @@
         <p:cNvGrpSpPr/>
         <p:nvPr/>
       </p:nvGrpSpPr>
-      <p:grpSpPr/>
+      <p:grpSpPr>
+        <a:xfrm>
+          <a:off x="0" y="0"/>
+          <a:ext cx="0" cy="0"/>
+          <a:chOff x="0" y="0"/>
+          <a:chExt cx="0" cy="0"/>
+        </a:xfrm>
+      </p:grpSpPr>
       <p:sp>
         <p:nvSpPr>
           <p:cNvPr id="2" name="Rectangle 1"/>
@@ -10101,6 +10272,7 @@
           <a:lstStyle/>
           <a:p>
             <a:pPr algn="ctr"/>
+            <a:endParaRPr/>
           </a:p>
         </p:txBody>
       </p:sp>
@@ -10178,6 +10350,7 @@
           <a:lstStyle/>
           <a:p>
             <a:pPr algn="ctr"/>
+            <a:endParaRPr/>
           </a:p>
         </p:txBody>
       </p:sp>
@@ -10255,6 +10428,7 @@
           <a:lstStyle/>
           <a:p>
             <a:pPr algn="ctr"/>
+            <a:endParaRPr/>
           </a:p>
         </p:txBody>
       </p:sp>
@@ -10266,7 +10440,7 @@
         </p:nvSpPr>
         <p:spPr>
           <a:xfrm>
-            <a:off x="365760" y="1828800"/>
+            <a:off x="365760" y="1485900"/>
             <a:ext cx="10972800" cy="365760"/>
           </a:xfrm>
           <a:prstGeom prst="rect">
@@ -10300,7 +10474,7 @@
         </p:nvSpPr>
         <p:spPr>
           <a:xfrm>
-            <a:off x="365760" y="2267712"/>
+            <a:off x="365760" y="1924812"/>
             <a:ext cx="10972800" cy="502920"/>
           </a:xfrm>
           <a:prstGeom prst="rect">
@@ -10334,7 +10508,7 @@
         </p:nvSpPr>
         <p:spPr>
           <a:xfrm>
-            <a:off x="365760" y="2816352"/>
+            <a:off x="365760" y="2473452"/>
             <a:ext cx="10972800" cy="502920"/>
           </a:xfrm>
           <a:prstGeom prst="rect">
@@ -10368,7 +10542,7 @@
         </p:nvSpPr>
         <p:spPr>
           <a:xfrm>
-            <a:off x="365760" y="3364992"/>
+            <a:off x="365760" y="3022092"/>
             <a:ext cx="10972800" cy="502920"/>
           </a:xfrm>
           <a:prstGeom prst="rect">
@@ -10402,7 +10576,7 @@
         </p:nvSpPr>
         <p:spPr>
           <a:xfrm>
-            <a:off x="365760" y="3913632"/>
+            <a:off x="365760" y="3474720"/>
             <a:ext cx="10972800" cy="502920"/>
           </a:xfrm>
           <a:prstGeom prst="rect">
@@ -10418,7 +10592,7 @@
           <a:p>
             <a:pPr algn="l"/>
             <a:r>
-              <a:rPr sz="2000" b="0" i="0">
+              <a:rPr sz="2000" b="0" i="0" dirty="0">
                 <a:solidFill>
                   <a:srgbClr val="2C2C2C"/>
                 </a:solidFill>
@@ -10436,7 +10610,7 @@
         </p:nvSpPr>
         <p:spPr>
           <a:xfrm>
-            <a:off x="365760" y="4462272"/>
+            <a:off x="365760" y="3902202"/>
             <a:ext cx="10972800" cy="502920"/>
           </a:xfrm>
           <a:prstGeom prst="rect">
@@ -10452,7 +10626,7 @@
           <a:p>
             <a:pPr algn="l"/>
             <a:r>
-              <a:rPr sz="2000" b="0" i="0">
+              <a:rPr sz="2000" b="0" i="0" dirty="0">
                 <a:solidFill>
                   <a:srgbClr val="2C2C2C"/>
                 </a:solidFill>
@@ -10470,7 +10644,7 @@
         </p:nvSpPr>
         <p:spPr>
           <a:xfrm>
-            <a:off x="365760" y="5010912"/>
+            <a:off x="365760" y="4313681"/>
             <a:ext cx="10972800" cy="365760"/>
           </a:xfrm>
           <a:prstGeom prst="rect">
@@ -10486,7 +10660,7 @@
           <a:p>
             <a:pPr algn="l"/>
             <a:r>
-              <a:rPr sz="2000" b="1" i="0">
+              <a:rPr sz="2000" b="1" i="0" dirty="0">
                 <a:solidFill>
                   <a:srgbClr val="245C94"/>
                 </a:solidFill>
@@ -10504,7 +10678,7 @@
         </p:nvSpPr>
         <p:spPr>
           <a:xfrm>
-            <a:off x="365760" y="5449823"/>
+            <a:off x="365760" y="4738623"/>
             <a:ext cx="10972800" cy="502920"/>
           </a:xfrm>
           <a:prstGeom prst="rect">
@@ -10520,7 +10694,7 @@
           <a:p>
             <a:pPr algn="l"/>
             <a:r>
-              <a:rPr sz="2000" b="0" i="0">
+              <a:rPr sz="2000" b="0" i="0" dirty="0">
                 <a:solidFill>
                   <a:srgbClr val="2C2C2C"/>
                 </a:solidFill>
@@ -10538,7 +10712,7 @@
         </p:nvSpPr>
         <p:spPr>
           <a:xfrm>
-            <a:off x="365760" y="5998463"/>
+            <a:off x="365760" y="5134863"/>
             <a:ext cx="10972800" cy="502920"/>
           </a:xfrm>
           <a:prstGeom prst="rect">
@@ -10554,7 +10728,7 @@
           <a:p>
             <a:pPr algn="l"/>
             <a:r>
-              <a:rPr sz="2000" b="0" i="0">
+              <a:rPr sz="2000" b="0" i="0" dirty="0">
                 <a:solidFill>
                   <a:srgbClr val="2C2C2C"/>
                 </a:solidFill>
@@ -10572,7 +10746,7 @@
         </p:nvSpPr>
         <p:spPr>
           <a:xfrm>
-            <a:off x="365760" y="6547103"/>
+            <a:off x="365760" y="5518403"/>
             <a:ext cx="10972800" cy="502920"/>
           </a:xfrm>
           <a:prstGeom prst="rect">
@@ -10588,7 +10762,7 @@
           <a:p>
             <a:pPr algn="l"/>
             <a:r>
-              <a:rPr sz="2000" b="0" i="0">
+              <a:rPr sz="2000" b="0" i="0" dirty="0">
                 <a:solidFill>
                   <a:srgbClr val="2C2C2C"/>
                 </a:solidFill>
@@ -10606,7 +10780,7 @@
         </p:nvSpPr>
         <p:spPr>
           <a:xfrm>
-            <a:off x="365760" y="7095743"/>
+            <a:off x="365760" y="5876543"/>
             <a:ext cx="10972800" cy="365760"/>
           </a:xfrm>
           <a:prstGeom prst="rect">
@@ -10622,7 +10796,7 @@
           <a:p>
             <a:pPr algn="l"/>
             <a:r>
-              <a:rPr sz="2000" b="1" i="0">
+              <a:rPr sz="2000" b="1" i="0" dirty="0">
                 <a:solidFill>
                   <a:srgbClr val="245C94"/>
                 </a:solidFill>
@@ -10640,7 +10814,7 @@
         </p:nvSpPr>
         <p:spPr>
           <a:xfrm>
-            <a:off x="365760" y="7534655"/>
+            <a:off x="365760" y="6188455"/>
             <a:ext cx="10972800" cy="502920"/>
           </a:xfrm>
           <a:prstGeom prst="rect">
@@ -10656,7 +10830,7 @@
           <a:p>
             <a:pPr algn="l"/>
             <a:r>
-              <a:rPr sz="2000" b="0" i="0">
+              <a:rPr sz="2000" b="0" i="0" dirty="0">
                 <a:solidFill>
                   <a:srgbClr val="2C2C2C"/>
                 </a:solidFill>
@@ -10674,7 +10848,7 @@
         </p:nvSpPr>
         <p:spPr>
           <a:xfrm>
-            <a:off x="365760" y="8083295"/>
+            <a:off x="365760" y="6483095"/>
             <a:ext cx="10972800" cy="502920"/>
           </a:xfrm>
           <a:prstGeom prst="rect">
@@ -10690,7 +10864,7 @@
           <a:p>
             <a:pPr algn="l"/>
             <a:r>
-              <a:rPr sz="2000" b="0" i="0">
+              <a:rPr sz="2000" b="0" i="0" dirty="0">
                 <a:solidFill>
                   <a:srgbClr val="2C2C2C"/>
                 </a:solidFill>
@@ -10709,7 +10883,7 @@
 </file>
 
 <file path=ppt/slides/slide9.xml><?xml version="1.0" encoding="utf-8"?>
-<p:sld xmlns:a="http://schemas.openxmlformats.org/drawingml/2006/main" xmlns:p="http://schemas.openxmlformats.org/presentationml/2006/main" xmlns:r="http://schemas.openxmlformats.org/officeDocument/2006/relationships">
+<p:sld xmlns:a="http://schemas.openxmlformats.org/drawingml/2006/main" xmlns:r="http://schemas.openxmlformats.org/officeDocument/2006/relationships" xmlns:p="http://schemas.openxmlformats.org/presentationml/2006/main">
   <p:cSld>
     <p:spTree>
       <p:nvGrpSpPr>
@@ -10717,7 +10891,14 @@
         <p:cNvGrpSpPr/>
         <p:nvPr/>
       </p:nvGrpSpPr>
-      <p:grpSpPr/>
+      <p:grpSpPr>
+        <a:xfrm>
+          <a:off x="0" y="0"/>
+          <a:ext cx="0" cy="0"/>
+          <a:chOff x="0" y="0"/>
+          <a:chExt cx="0" cy="0"/>
+        </a:xfrm>
+      </p:grpSpPr>
       <p:sp>
         <p:nvSpPr>
           <p:cNvPr id="2" name="Rectangle 1"/>
@@ -10758,6 +10939,7 @@
           <a:lstStyle/>
           <a:p>
             <a:pPr algn="ctr"/>
+            <a:endParaRPr/>
           </a:p>
         </p:txBody>
       </p:sp>
@@ -10835,6 +11017,7 @@
           <a:lstStyle/>
           <a:p>
             <a:pPr algn="ctr"/>
+            <a:endParaRPr/>
           </a:p>
         </p:txBody>
       </p:sp>
@@ -10912,6 +11095,7 @@
           <a:lstStyle/>
           <a:p>
             <a:pPr algn="ctr"/>
+            <a:endParaRPr/>
           </a:p>
         </p:txBody>
       </p:sp>

--- a/results/presentation.pptx
+++ b/results/presentation.pptx
@@ -3534,7 +3534,7 @@
           <a:p>
             <a:pPr algn="l"/>
             <a:r>
-              <a:rPr sz="3200" b="1" i="0">
+              <a:rPr sz="3200" b="1" i="0" dirty="0">
                 <a:solidFill>
                   <a:srgbClr val="FFFFFF"/>
                 </a:solidFill>
@@ -3817,7 +3817,7 @@
           <a:p>
             <a:pPr algn="l"/>
             <a:r>
-              <a:rPr sz="3200" b="1" i="0">
+              <a:rPr sz="3200" b="1" i="0" dirty="0">
                 <a:solidFill>
                   <a:srgbClr val="FFFFFF"/>
                 </a:solidFill>
@@ -4100,7 +4100,7 @@
           <a:p>
             <a:pPr algn="l"/>
             <a:r>
-              <a:rPr sz="3200" b="1" i="0">
+              <a:rPr sz="3200" b="1" i="0" dirty="0">
                 <a:solidFill>
                   <a:srgbClr val="FFFFFF"/>
                 </a:solidFill>
@@ -4445,28 +4445,41 @@
         <p:spPr>
           <a:xfrm>
             <a:off x="365760" y="4435856"/>
-            <a:ext cx="10972800" cy="502920"/>
-          </a:xfrm>
-          <a:prstGeom prst="rect">
-            <a:avLst/>
-          </a:prstGeom>
-          <a:noFill/>
-        </p:spPr>
-        <p:txBody>
-          <a:bodyPr wrap="square">
-            <a:spAutoFit/>
-          </a:bodyPr>
-          <a:lstStyle/>
-          <a:p>
-            <a:pPr algn="l"/>
-            <a:r>
-              <a:rPr sz="2000" b="0" i="0">
+            <a:ext cx="10972800" cy="400110"/>
+          </a:xfrm>
+          <a:prstGeom prst="rect">
+            <a:avLst/>
+          </a:prstGeom>
+          <a:noFill/>
+        </p:spPr>
+        <p:txBody>
+          <a:bodyPr wrap="square">
+            <a:spAutoFit/>
+          </a:bodyPr>
+          <a:lstStyle/>
+          <a:p>
+            <a:pPr algn="l"/>
+            <a:r>
+              <a:rPr sz="2000" b="0" i="0" dirty="0">
                 <a:solidFill>
                   <a:srgbClr val="2C2C2C"/>
                 </a:solidFill>
               </a:rPr>
-              <a:t>• 5 agent counts: 4, 6, 8, 10, 12 agents</a:t>
-            </a:r>
+              <a:t>• </a:t>
+            </a:r>
+            <a:r>
+              <a:rPr lang="en-US" sz="2000" b="0" i="0" dirty="0">
+                <a:solidFill>
+                  <a:srgbClr val="2C2C2C"/>
+                </a:solidFill>
+              </a:rPr>
+              <a:t>Tested agent counts from 4 to 20 agents (4, 6, 8, 10, 12, 15, 18, 20)</a:t>
+            </a:r>
+            <a:endParaRPr sz="2000" b="0" i="0" dirty="0">
+              <a:solidFill>
+                <a:srgbClr val="2C2C2C"/>
+              </a:solidFill>
+            </a:endParaRPr>
           </a:p>
         </p:txBody>
       </p:sp>
@@ -4494,7 +4507,7 @@
           <a:p>
             <a:pPr algn="l"/>
             <a:r>
-              <a:rPr sz="2000" b="0" i="0">
+              <a:rPr sz="2000" b="0" i="0" dirty="0">
                 <a:solidFill>
                   <a:srgbClr val="2C2C2C"/>
                 </a:solidFill>
@@ -4699,7 +4712,7 @@
           <a:p>
             <a:pPr algn="l"/>
             <a:r>
-              <a:rPr sz="3200" b="1" i="0">
+              <a:rPr sz="3200" b="1" i="0" dirty="0">
                 <a:solidFill>
                   <a:srgbClr val="FFFFFF"/>
                 </a:solidFill>
@@ -4982,7 +4995,7 @@
           <a:p>
             <a:pPr algn="l"/>
             <a:r>
-              <a:rPr sz="3200" b="1" i="0">
+              <a:rPr sz="3200" b="1" i="0" dirty="0">
                 <a:solidFill>
                   <a:srgbClr val="FFFFFF"/>
                 </a:solidFill>
@@ -5395,7 +5408,7 @@
         <p:spPr>
           <a:xfrm>
             <a:off x="365760" y="4415536"/>
-            <a:ext cx="10972800" cy="502920"/>
+            <a:ext cx="10972800" cy="400110"/>
           </a:xfrm>
           <a:prstGeom prst="rect">
             <a:avLst/>
@@ -5415,7 +5428,23 @@
                   <a:srgbClr val="2C2C2C"/>
                 </a:solidFill>
               </a:rPr>
-              <a:t>• 4-agent problems solved in under 1 millisecond</a:t>
+              <a:t>• 4-agent problems solved in under </a:t>
+            </a:r>
+            <a:r>
+              <a:rPr lang="he-IL" sz="2000" b="0" i="0" dirty="0">
+                <a:solidFill>
+                  <a:srgbClr val="2C2C2C"/>
+                </a:solidFill>
+              </a:rPr>
+              <a:t>2</a:t>
+            </a:r>
+            <a:r>
+              <a:rPr sz="2000" b="0" i="0" dirty="0">
+                <a:solidFill>
+                  <a:srgbClr val="2C2C2C"/>
+                </a:solidFill>
+              </a:rPr>
+              <a:t> millisecond</a:t>
             </a:r>
           </a:p>
         </p:txBody>
@@ -5429,28 +5458,56 @@
         <p:spPr>
           <a:xfrm>
             <a:off x="365760" y="4811775"/>
-            <a:ext cx="10972800" cy="502920"/>
-          </a:xfrm>
-          <a:prstGeom prst="rect">
-            <a:avLst/>
-          </a:prstGeom>
-          <a:noFill/>
-        </p:spPr>
-        <p:txBody>
-          <a:bodyPr wrap="square">
-            <a:spAutoFit/>
-          </a:bodyPr>
-          <a:lstStyle/>
-          <a:p>
-            <a:pPr algn="l"/>
+            <a:ext cx="10972800" cy="400110"/>
+          </a:xfrm>
+          <a:prstGeom prst="rect">
+            <a:avLst/>
+          </a:prstGeom>
+          <a:noFill/>
+        </p:spPr>
+        <p:txBody>
+          <a:bodyPr wrap="square">
+            <a:spAutoFit/>
+          </a:bodyPr>
+          <a:lstStyle/>
+          <a:p>
             <a:r>
               <a:rPr sz="2000" b="0" i="0" dirty="0">
                 <a:solidFill>
                   <a:srgbClr val="2C2C2C"/>
                 </a:solidFill>
               </a:rPr>
-              <a:t>• 12-agent warehouse problems solved within 15 seconds</a:t>
-            </a:r>
+              <a:t>• </a:t>
+            </a:r>
+            <a:r>
+              <a:rPr lang="en-US" sz="2000" b="0" i="0" dirty="0">
+                <a:solidFill>
+                  <a:srgbClr val="2C2C2C"/>
+                </a:solidFill>
+              </a:rPr>
+              <a:t>10-agent warehouse problems solved in </a:t>
+            </a:r>
+            <a:r>
+              <a:rPr lang="en-US" sz="2000" dirty="0">
+                <a:solidFill>
+                  <a:srgbClr val="2C2C2C"/>
+                </a:solidFill>
+              </a:rPr>
+              <a:t>14 millisecond </a:t>
+            </a:r>
+            <a:r>
+              <a:rPr lang="en-US" sz="2000" b="0" i="0" dirty="0">
+                <a:solidFill>
+                  <a:srgbClr val="2C2C2C"/>
+                </a:solidFill>
+              </a:rPr>
+              <a:t>on average</a:t>
+            </a:r>
+            <a:endParaRPr sz="2000" b="0" i="0" dirty="0">
+              <a:solidFill>
+                <a:srgbClr val="2C2C2C"/>
+              </a:solidFill>
+            </a:endParaRPr>
           </a:p>
         </p:txBody>
       </p:sp>
@@ -7514,27 +7571,26 @@
         <p:spPr>
           <a:xfrm>
             <a:off x="378460" y="3608832"/>
-            <a:ext cx="10972800" cy="502920"/>
-          </a:xfrm>
-          <a:prstGeom prst="rect">
-            <a:avLst/>
-          </a:prstGeom>
-          <a:noFill/>
-        </p:spPr>
-        <p:txBody>
-          <a:bodyPr wrap="square">
-            <a:spAutoFit/>
-          </a:bodyPr>
-          <a:lstStyle/>
-          <a:p>
-            <a:pPr algn="l"/>
-            <a:r>
-              <a:rPr sz="2000" b="0" i="0">
+            <a:ext cx="10972800" cy="400110"/>
+          </a:xfrm>
+          <a:prstGeom prst="rect">
+            <a:avLst/>
+          </a:prstGeom>
+          <a:noFill/>
+        </p:spPr>
+        <p:txBody>
+          <a:bodyPr wrap="square">
+            <a:spAutoFit/>
+          </a:bodyPr>
+          <a:lstStyle/>
+          <a:p>
+            <a:r>
+              <a:rPr lang="en-US" sz="2000" dirty="0">
                 <a:solidFill>
                   <a:srgbClr val="2C2C2C"/>
                 </a:solidFill>
               </a:rPr>
-              <a:t>• 10 agents × 5 vertices  →  9,765,624 joint states</a:t>
+              <a:t>• 10 agents × 5 vertices  →  9,765,625 joint states </a:t>
             </a:r>
           </a:p>
         </p:txBody>
@@ -10967,7 +11023,7 @@
           <a:p>
             <a:pPr algn="l"/>
             <a:r>
-              <a:rPr sz="3200" b="1" i="0">
+              <a:rPr sz="3200" b="1" i="0" dirty="0">
                 <a:solidFill>
                   <a:srgbClr val="FFFFFF"/>
                 </a:solidFill>
